--- a/[Document]/소개운영자료/소개자료/[DIVE_운영방향_김경원교수].pptx
+++ b/[Document]/소개운영자료/소개자료/[DIVE_운영방향_김경원교수].pptx
@@ -5,18 +5,19 @@
     <p:sldMasterId id="2147483648" r:id="rId1"/>
   </p:sldMasterIdLst>
   <p:notesMasterIdLst>
-    <p:notesMasterId r:id="rId8"/>
+    <p:notesMasterId r:id="rId9"/>
   </p:notesMasterIdLst>
   <p:handoutMasterIdLst>
-    <p:handoutMasterId r:id="rId9"/>
+    <p:handoutMasterId r:id="rId10"/>
   </p:handoutMasterIdLst>
   <p:sldIdLst>
     <p:sldId id="372" r:id="rId2"/>
     <p:sldId id="365" r:id="rId3"/>
-    <p:sldId id="367" r:id="rId4"/>
-    <p:sldId id="370" r:id="rId5"/>
-    <p:sldId id="371" r:id="rId6"/>
-    <p:sldId id="369" r:id="rId7"/>
+    <p:sldId id="373" r:id="rId4"/>
+    <p:sldId id="367" r:id="rId5"/>
+    <p:sldId id="370" r:id="rId6"/>
+    <p:sldId id="371" r:id="rId7"/>
+    <p:sldId id="369" r:id="rId8"/>
   </p:sldIdLst>
   <p:sldSz cx="9144000" cy="6858000" type="screen4x3"/>
   <p:notesSz cx="6797675" cy="9926638"/>
@@ -289,7 +290,7 @@
       </p15:notesGuideLst>
     </p:ext>
     <p:ext uri="http://customooxmlschemas.google.com/">
-      <go:slidesCustomData xmlns="" xmlns:mc="http://schemas.openxmlformats.org/markup-compatibility/2006" xmlns:mv="urn:schemas-microsoft-com:mac:vml" xmlns:c="http://schemas.openxmlformats.org/drawingml/2006/chart" xmlns:dgm="http://schemas.openxmlformats.org/drawingml/2006/diagram" xmlns:o="urn:schemas-microsoft-com:office:office" xmlns:v="urn:schemas-microsoft-com:vml" xmlns:pvml="urn:schemas-microsoft-com:office:powerpoint" xmlns:com="http://schemas.openxmlformats.org/drawingml/2006/compatibility" xmlns:p14="http://schemas.microsoft.com/office/powerpoint/2010/main" xmlns:p15="http://schemas.microsoft.com/office/powerpoint/2012/main" xmlns:go="http://customooxmlschemas.google.com/" r:id="rId105" roundtripDataSignature="AMtx7miUWwlRzSp7FmXEzuK0I58SVnBqRw=="/>
+      <go:slidesCustomData xmlns:go="http://customooxmlschemas.google.com/" xmlns:p15="http://schemas.microsoft.com/office/powerpoint/2012/main" xmlns:p14="http://schemas.microsoft.com/office/powerpoint/2010/main" xmlns:com="http://schemas.openxmlformats.org/drawingml/2006/compatibility" xmlns:pvml="urn:schemas-microsoft-com:office:powerpoint" xmlns:v="urn:schemas-microsoft-com:vml" xmlns:o="urn:schemas-microsoft-com:office:office" xmlns:dgm="http://schemas.openxmlformats.org/drawingml/2006/diagram" xmlns:c="http://schemas.openxmlformats.org/drawingml/2006/chart" xmlns:mv="urn:schemas-microsoft-com:mac:vml" xmlns:mc="http://schemas.openxmlformats.org/markup-compatibility/2006" xmlns="" r:id="rId105" roundtripDataSignature="AMtx7miUWwlRzSp7FmXEzuK0I58SVnBqRw=="/>
     </p:ext>
   </p:extLst>
 </p:presentation>
@@ -389,7 +390,7 @@
           <a:p>
             <a:fld id="{0FE758C4-0839-4DFD-B23C-C4B0E1666FA8}" type="datetimeFigureOut">
               <a:rPr lang="ko-KR" altLang="en-US" smtClean="0"/>
-              <a:t>2026-03-03</a:t>
+              <a:t>2026-04-16</a:t>
             </a:fld>
             <a:endParaRPr lang="ko-KR" altLang="en-US"/>
           </a:p>
@@ -2178,6 +2179,133 @@
         <p:cNvPr id="1" name="Shape 572">
           <a:extLst>
             <a:ext uri="{FF2B5EF4-FFF2-40B4-BE49-F238E27FC236}">
+              <a16:creationId xmlns:a16="http://schemas.microsoft.com/office/drawing/2014/main" id="{220475B2-B676-AD2C-4943-EA4B14328334}"/>
+            </a:ext>
+          </a:extLst>
+        </p:cNvPr>
+        <p:cNvGrpSpPr/>
+        <p:nvPr/>
+      </p:nvGrpSpPr>
+      <p:grpSpPr>
+        <a:xfrm>
+          <a:off x="0" y="0"/>
+          <a:ext cx="0" cy="0"/>
+          <a:chOff x="0" y="0"/>
+          <a:chExt cx="0" cy="0"/>
+        </a:xfrm>
+      </p:grpSpPr>
+      <p:sp>
+        <p:nvSpPr>
+          <p:cNvPr id="573" name="Google Shape;573;p41:notes">
+            <a:extLst>
+              <a:ext uri="{FF2B5EF4-FFF2-40B4-BE49-F238E27FC236}">
+                <a16:creationId xmlns:a16="http://schemas.microsoft.com/office/drawing/2014/main" id="{2DA4CCD5-D5C3-1ED4-C48A-4B40D46CAA0D}"/>
+              </a:ext>
+            </a:extLst>
+          </p:cNvPr>
+          <p:cNvSpPr txBox="1">
+            <a:spLocks noGrp="1"/>
+          </p:cNvSpPr>
+          <p:nvPr>
+            <p:ph type="body" idx="1"/>
+          </p:nvPr>
+        </p:nvSpPr>
+        <p:spPr>
+          <a:xfrm>
+            <a:off x="679768" y="4715154"/>
+            <a:ext cx="5438140" cy="4466987"/>
+          </a:xfrm>
+          <a:prstGeom prst="rect">
+            <a:avLst/>
+          </a:prstGeom>
+        </p:spPr>
+        <p:txBody>
+          <a:bodyPr spcFirstLastPara="1" wrap="square" lIns="91425" tIns="45700" rIns="91425" bIns="45700" anchor="t" anchorCtr="0">
+            <a:noAutofit/>
+          </a:bodyPr>
+          <a:lstStyle/>
+          <a:p>
+            <a:pPr marL="0" lvl="0" indent="0" algn="l" rtl="0">
+              <a:spcBef>
+                <a:spcPts val="0"/>
+              </a:spcBef>
+              <a:spcAft>
+                <a:spcPts val="0"/>
+              </a:spcAft>
+              <a:buNone/>
+            </a:pPr>
+            <a:endParaRPr/>
+          </a:p>
+        </p:txBody>
+      </p:sp>
+      <p:sp>
+        <p:nvSpPr>
+          <p:cNvPr id="574" name="Google Shape;574;p41:notes">
+            <a:extLst>
+              <a:ext uri="{FF2B5EF4-FFF2-40B4-BE49-F238E27FC236}">
+                <a16:creationId xmlns:a16="http://schemas.microsoft.com/office/drawing/2014/main" id="{BBA2AB30-D2C7-3CEF-CC3F-B4E907208B38}"/>
+              </a:ext>
+            </a:extLst>
+          </p:cNvPr>
+          <p:cNvSpPr>
+            <a:spLocks noGrp="1" noRot="1" noChangeAspect="1"/>
+          </p:cNvSpPr>
+          <p:nvPr>
+            <p:ph type="sldImg" idx="2"/>
+          </p:nvPr>
+        </p:nvSpPr>
+        <p:spPr>
+          <a:xfrm>
+            <a:off x="917575" y="744538"/>
+            <a:ext cx="4962525" cy="3722687"/>
+          </a:xfrm>
+          <a:custGeom>
+            <a:avLst/>
+            <a:gdLst/>
+            <a:ahLst/>
+            <a:cxnLst/>
+            <a:rect l="l" t="t" r="r" b="b"/>
+            <a:pathLst>
+              <a:path w="120000" h="120000" extrusionOk="0">
+                <a:moveTo>
+                  <a:pt x="0" y="0"/>
+                </a:moveTo>
+                <a:lnTo>
+                  <a:pt x="120000" y="0"/>
+                </a:lnTo>
+                <a:lnTo>
+                  <a:pt x="120000" y="120000"/>
+                </a:lnTo>
+                <a:lnTo>
+                  <a:pt x="0" y="120000"/>
+                </a:lnTo>
+                <a:close/>
+              </a:path>
+            </a:pathLst>
+          </a:custGeom>
+        </p:spPr>
+      </p:sp>
+    </p:spTree>
+    <p:extLst>
+      <p:ext uri="{BB962C8B-B14F-4D97-AF65-F5344CB8AC3E}">
+        <p14:creationId xmlns:p14="http://schemas.microsoft.com/office/powerpoint/2010/main" val="1295351596"/>
+      </p:ext>
+    </p:extLst>
+  </p:cSld>
+  <p:clrMapOvr>
+    <a:masterClrMapping/>
+  </p:clrMapOvr>
+</p:notes>
+</file>
+
+<file path=ppt/notesSlides/notesSlide4.xml><?xml version="1.0" encoding="utf-8"?>
+<p:notes xmlns:a="http://schemas.openxmlformats.org/drawingml/2006/main" xmlns:r="http://schemas.openxmlformats.org/officeDocument/2006/relationships" xmlns:p="http://schemas.openxmlformats.org/presentationml/2006/main" showMasterSp="0" showMasterPhAnim="0">
+  <p:cSld>
+    <p:spTree>
+      <p:nvGrpSpPr>
+        <p:cNvPr id="1" name="Shape 572">
+          <a:extLst>
+            <a:ext uri="{FF2B5EF4-FFF2-40B4-BE49-F238E27FC236}">
               <a16:creationId xmlns:a16="http://schemas.microsoft.com/office/drawing/2014/main" id="{6D995013-4226-2582-4E70-CEB26ABBE43B}"/>
             </a:ext>
           </a:extLst>
@@ -2297,7 +2425,7 @@
 </p:notes>
 </file>
 
-<file path=ppt/notesSlides/notesSlide4.xml><?xml version="1.0" encoding="utf-8"?>
+<file path=ppt/notesSlides/notesSlide5.xml><?xml version="1.0" encoding="utf-8"?>
 <p:notes xmlns:a="http://schemas.openxmlformats.org/drawingml/2006/main" xmlns:r="http://schemas.openxmlformats.org/officeDocument/2006/relationships" xmlns:p="http://schemas.openxmlformats.org/presentationml/2006/main" showMasterSp="0" showMasterPhAnim="0">
   <p:cSld>
     <p:spTree>
@@ -2424,7 +2552,7 @@
 </p:notes>
 </file>
 
-<file path=ppt/notesSlides/notesSlide5.xml><?xml version="1.0" encoding="utf-8"?>
+<file path=ppt/notesSlides/notesSlide6.xml><?xml version="1.0" encoding="utf-8"?>
 <p:notes xmlns:a="http://schemas.openxmlformats.org/drawingml/2006/main" xmlns:r="http://schemas.openxmlformats.org/officeDocument/2006/relationships" xmlns:p="http://schemas.openxmlformats.org/presentationml/2006/main" showMasterSp="0" showMasterPhAnim="0">
   <p:cSld>
     <p:spTree>
@@ -2551,7 +2679,7 @@
 </p:notes>
 </file>
 
-<file path=ppt/notesSlides/notesSlide6.xml><?xml version="1.0" encoding="utf-8"?>
+<file path=ppt/notesSlides/notesSlide7.xml><?xml version="1.0" encoding="utf-8"?>
 <p:notes xmlns:a="http://schemas.openxmlformats.org/drawingml/2006/main" xmlns:r="http://schemas.openxmlformats.org/officeDocument/2006/relationships" xmlns:p="http://schemas.openxmlformats.org/presentationml/2006/main" showMasterSp="0" showMasterPhAnim="0">
   <p:cSld>
     <p:spTree>
@@ -14579,6 +14707,2386 @@
         <p:cNvPr id="1" name="Shape 575">
           <a:extLst>
             <a:ext uri="{FF2B5EF4-FFF2-40B4-BE49-F238E27FC236}">
+              <a16:creationId xmlns:a16="http://schemas.microsoft.com/office/drawing/2014/main" id="{EC07AA73-8CF4-F821-D7BF-E7DE7DCDC836}"/>
+            </a:ext>
+          </a:extLst>
+        </p:cNvPr>
+        <p:cNvGrpSpPr/>
+        <p:nvPr/>
+      </p:nvGrpSpPr>
+      <p:grpSpPr>
+        <a:xfrm>
+          <a:off x="0" y="0"/>
+          <a:ext cx="0" cy="0"/>
+          <a:chOff x="0" y="0"/>
+          <a:chExt cx="0" cy="0"/>
+        </a:xfrm>
+      </p:grpSpPr>
+      <p:sp>
+        <p:nvSpPr>
+          <p:cNvPr id="576" name="Google Shape;576;p41">
+            <a:extLst>
+              <a:ext uri="{FF2B5EF4-FFF2-40B4-BE49-F238E27FC236}">
+                <a16:creationId xmlns:a16="http://schemas.microsoft.com/office/drawing/2014/main" id="{8BFDE12B-E9C1-870D-F9F2-0962FDE1FD5E}"/>
+              </a:ext>
+            </a:extLst>
+          </p:cNvPr>
+          <p:cNvSpPr txBox="1"/>
+          <p:nvPr/>
+        </p:nvSpPr>
+        <p:spPr>
+          <a:xfrm>
+            <a:off x="112295" y="101025"/>
+            <a:ext cx="8919300" cy="461700"/>
+          </a:xfrm>
+          <a:prstGeom prst="rect">
+            <a:avLst/>
+          </a:prstGeom>
+          <a:noFill/>
+          <a:ln>
+            <a:noFill/>
+          </a:ln>
+        </p:spPr>
+        <p:txBody>
+          <a:bodyPr spcFirstLastPara="1" wrap="square" lIns="91425" tIns="45700" rIns="91425" bIns="45700" anchor="t" anchorCtr="0">
+            <a:noAutofit/>
+          </a:bodyPr>
+          <a:lstStyle/>
+          <a:p>
+            <a:pPr marL="0" marR="0" lvl="0" indent="0" algn="l" rtl="0">
+              <a:lnSpc>
+                <a:spcPct val="100000"/>
+              </a:lnSpc>
+              <a:spcBef>
+                <a:spcPts val="0"/>
+              </a:spcBef>
+              <a:spcAft>
+                <a:spcPts val="0"/>
+              </a:spcAft>
+              <a:buNone/>
+            </a:pPr>
+            <a:r>
+              <a:rPr lang="en-US" sz="2400" b="1" i="0" u="none" strike="noStrike" cap="none">
+                <a:solidFill>
+                  <a:schemeClr val="lt1"/>
+                </a:solidFill>
+                <a:latin typeface="Calibri"/>
+                <a:ea typeface="Calibri"/>
+                <a:cs typeface="Calibri"/>
+                <a:sym typeface="Calibri"/>
+              </a:rPr>
+              <a:t>Introduction of DIVE Research Group</a:t>
+            </a:r>
+            <a:endParaRPr/>
+          </a:p>
+        </p:txBody>
+      </p:sp>
+      <p:sp>
+        <p:nvSpPr>
+          <p:cNvPr id="579" name="Google Shape;579;p41">
+            <a:extLst>
+              <a:ext uri="{FF2B5EF4-FFF2-40B4-BE49-F238E27FC236}">
+                <a16:creationId xmlns:a16="http://schemas.microsoft.com/office/drawing/2014/main" id="{AB8AF68A-5E89-30E3-E790-A5CE7C4139E1}"/>
+              </a:ext>
+            </a:extLst>
+          </p:cNvPr>
+          <p:cNvSpPr txBox="1"/>
+          <p:nvPr/>
+        </p:nvSpPr>
+        <p:spPr>
+          <a:xfrm>
+            <a:off x="1507587" y="645940"/>
+            <a:ext cx="6128825" cy="892512"/>
+          </a:xfrm>
+          <a:prstGeom prst="rect">
+            <a:avLst/>
+          </a:prstGeom>
+          <a:noFill/>
+          <a:ln>
+            <a:noFill/>
+          </a:ln>
+        </p:spPr>
+        <p:txBody>
+          <a:bodyPr spcFirstLastPara="1" wrap="square" lIns="91425" tIns="45700" rIns="91425" bIns="45700" anchor="t" anchorCtr="0">
+            <a:spAutoFit/>
+          </a:bodyPr>
+          <a:lstStyle/>
+          <a:p>
+            <a:pPr algn="ctr"/>
+            <a:r>
+              <a:rPr lang="en-US" altLang="ko-KR" sz="3200" b="1">
+                <a:solidFill>
+                  <a:srgbClr val="C00000"/>
+                </a:solidFill>
+                <a:latin typeface="Calibri"/>
+                <a:ea typeface="Calibri"/>
+                <a:cs typeface="Calibri"/>
+                <a:sym typeface="Calibri"/>
+              </a:rPr>
+              <a:t>DIVE</a:t>
+            </a:r>
+            <a:r>
+              <a:rPr lang="en-US" altLang="ko-KR" sz="3200" b="1">
+                <a:solidFill>
+                  <a:srgbClr val="002060"/>
+                </a:solidFill>
+                <a:latin typeface="Calibri"/>
+                <a:ea typeface="Calibri"/>
+                <a:cs typeface="Calibri"/>
+                <a:sym typeface="Calibri"/>
+              </a:rPr>
+              <a:t> Time</a:t>
+            </a:r>
+            <a:r>
+              <a:rPr lang="ko-KR" altLang="en-US" sz="3200" b="1">
+                <a:solidFill>
+                  <a:srgbClr val="002060"/>
+                </a:solidFill>
+                <a:latin typeface="Calibri"/>
+                <a:ea typeface="Calibri"/>
+                <a:cs typeface="Calibri"/>
+                <a:sym typeface="Calibri"/>
+              </a:rPr>
+              <a:t> </a:t>
+            </a:r>
+            <a:r>
+              <a:rPr lang="en-US" altLang="ko-KR" sz="3200" b="1">
+                <a:solidFill>
+                  <a:srgbClr val="002060"/>
+                </a:solidFill>
+                <a:latin typeface="Calibri"/>
+                <a:ea typeface="Calibri"/>
+                <a:cs typeface="Calibri"/>
+                <a:sym typeface="Calibri"/>
+              </a:rPr>
+              <a:t>Line</a:t>
+            </a:r>
+          </a:p>
+          <a:p>
+            <a:pPr algn="ctr"/>
+            <a:r>
+              <a:rPr lang="en-US" altLang="ko-KR" sz="2000" b="1">
+                <a:solidFill>
+                  <a:srgbClr val="002060"/>
+                </a:solidFill>
+                <a:latin typeface="Calibri"/>
+                <a:ea typeface="Calibri"/>
+                <a:cs typeface="Calibri"/>
+                <a:sym typeface="Calibri"/>
+              </a:rPr>
+              <a:t>(</a:t>
+            </a:r>
+            <a:r>
+              <a:rPr lang="ko-KR" altLang="en-US" sz="2000" b="1">
+                <a:solidFill>
+                  <a:srgbClr val="002060"/>
+                </a:solidFill>
+                <a:latin typeface="Calibri"/>
+                <a:ea typeface="Calibri"/>
+                <a:cs typeface="Calibri"/>
+                <a:sym typeface="Calibri"/>
+              </a:rPr>
+              <a:t>이상적인 방향이며 개인별 맞춤 분기별 선택</a:t>
+            </a:r>
+            <a:r>
+              <a:rPr lang="en-US" altLang="ko-KR" sz="2000" b="1">
+                <a:solidFill>
+                  <a:srgbClr val="002060"/>
+                </a:solidFill>
+                <a:latin typeface="Calibri"/>
+                <a:ea typeface="Calibri"/>
+                <a:cs typeface="Calibri"/>
+                <a:sym typeface="Calibri"/>
+              </a:rPr>
+              <a:t>!)</a:t>
+            </a:r>
+          </a:p>
+        </p:txBody>
+      </p:sp>
+      <p:sp>
+        <p:nvSpPr>
+          <p:cNvPr id="2" name="슬라이드 번호 개체 틀 1">
+            <a:extLst>
+              <a:ext uri="{FF2B5EF4-FFF2-40B4-BE49-F238E27FC236}">
+                <a16:creationId xmlns:a16="http://schemas.microsoft.com/office/drawing/2014/main" id="{CA065B86-9152-D394-5604-DB9BE90DD1A1}"/>
+              </a:ext>
+            </a:extLst>
+          </p:cNvPr>
+          <p:cNvSpPr>
+            <a:spLocks noGrp="1"/>
+          </p:cNvSpPr>
+          <p:nvPr>
+            <p:ph type="sldNum" sz="quarter" idx="4"/>
+          </p:nvPr>
+        </p:nvSpPr>
+        <p:spPr/>
+        <p:txBody>
+          <a:bodyPr/>
+          <a:lstStyle/>
+          <a:p>
+            <a:fld id="{CDF9F5A3-DAD3-49E7-B926-6F61E4EB127E}" type="slidenum">
+              <a:rPr lang="ko-KR" altLang="en-US" smtClean="0"/>
+              <a:pPr/>
+              <a:t>2</a:t>
+            </a:fld>
+            <a:r>
+              <a:rPr lang="ko-KR" altLang="en-US"/>
+              <a:t> </a:t>
+            </a:r>
+            <a:r>
+              <a:rPr lang="en-US" altLang="ko-KR"/>
+              <a:t>/ 37</a:t>
+            </a:r>
+            <a:endParaRPr lang="ko-KR" altLang="en-US" dirty="0"/>
+          </a:p>
+        </p:txBody>
+      </p:sp>
+      <p:sp>
+        <p:nvSpPr>
+          <p:cNvPr id="578" name="화살표: 갈매기형 수장 577">
+            <a:extLst>
+              <a:ext uri="{FF2B5EF4-FFF2-40B4-BE49-F238E27FC236}">
+                <a16:creationId xmlns:a16="http://schemas.microsoft.com/office/drawing/2014/main" id="{46AA2263-11A2-5CA4-720F-7FBD2E9EC014}"/>
+              </a:ext>
+            </a:extLst>
+          </p:cNvPr>
+          <p:cNvSpPr/>
+          <p:nvPr/>
+        </p:nvSpPr>
+        <p:spPr>
+          <a:xfrm>
+            <a:off x="105509" y="1713768"/>
+            <a:ext cx="2342874" cy="515566"/>
+          </a:xfrm>
+          <a:prstGeom prst="chevron">
+            <a:avLst/>
+          </a:prstGeom>
+          <a:solidFill>
+            <a:srgbClr val="92D050"/>
+          </a:solidFill>
+          <a:ln>
+            <a:noFill/>
+          </a:ln>
+        </p:spPr>
+        <p:style>
+          <a:lnRef idx="2">
+            <a:schemeClr val="accent1">
+              <a:shade val="50000"/>
+            </a:schemeClr>
+          </a:lnRef>
+          <a:fillRef idx="1">
+            <a:schemeClr val="accent1"/>
+          </a:fillRef>
+          <a:effectRef idx="0">
+            <a:schemeClr val="accent1"/>
+          </a:effectRef>
+          <a:fontRef idx="minor">
+            <a:schemeClr val="lt1"/>
+          </a:fontRef>
+        </p:style>
+        <p:txBody>
+          <a:bodyPr rtlCol="0" anchor="ctr"/>
+          <a:lstStyle/>
+          <a:p>
+            <a:pPr algn="ctr"/>
+            <a:endParaRPr lang="ko-KR" altLang="en-US"/>
+          </a:p>
+        </p:txBody>
+      </p:sp>
+      <p:sp>
+        <p:nvSpPr>
+          <p:cNvPr id="584" name="TextBox 583">
+            <a:extLst>
+              <a:ext uri="{FF2B5EF4-FFF2-40B4-BE49-F238E27FC236}">
+                <a16:creationId xmlns:a16="http://schemas.microsoft.com/office/drawing/2014/main" id="{42F04555-F346-F85D-7F51-92842D372BE1}"/>
+              </a:ext>
+            </a:extLst>
+          </p:cNvPr>
+          <p:cNvSpPr txBox="1"/>
+          <p:nvPr/>
+        </p:nvSpPr>
+        <p:spPr>
+          <a:xfrm>
+            <a:off x="381606" y="1628864"/>
+            <a:ext cx="1772348" cy="646331"/>
+          </a:xfrm>
+          <a:prstGeom prst="rect">
+            <a:avLst/>
+          </a:prstGeom>
+          <a:noFill/>
+        </p:spPr>
+        <p:txBody>
+          <a:bodyPr wrap="square" rtlCol="0">
+            <a:spAutoFit/>
+          </a:bodyPr>
+          <a:lstStyle/>
+          <a:p>
+            <a:pPr algn="ctr"/>
+            <a:r>
+              <a:rPr lang="en-US" altLang="ko-KR" sz="1800" b="1">
+                <a:solidFill>
+                  <a:schemeClr val="bg1"/>
+                </a:solidFill>
+              </a:rPr>
+              <a:t>2025 3Q</a:t>
+            </a:r>
+          </a:p>
+          <a:p>
+            <a:pPr algn="ctr"/>
+            <a:r>
+              <a:rPr lang="en-US" altLang="ko-KR" sz="1800" b="1">
+                <a:solidFill>
+                  <a:schemeClr val="bg1"/>
+                </a:solidFill>
+              </a:rPr>
+              <a:t>(7~8M)</a:t>
+            </a:r>
+            <a:endParaRPr lang="ko-KR" altLang="en-US" sz="1800" b="1" dirty="0">
+              <a:solidFill>
+                <a:schemeClr val="bg1"/>
+              </a:solidFill>
+            </a:endParaRPr>
+          </a:p>
+        </p:txBody>
+      </p:sp>
+      <p:cxnSp>
+        <p:nvCxnSpPr>
+          <p:cNvPr id="588" name="직선 화살표 연결선 587">
+            <a:extLst>
+              <a:ext uri="{FF2B5EF4-FFF2-40B4-BE49-F238E27FC236}">
+                <a16:creationId xmlns:a16="http://schemas.microsoft.com/office/drawing/2014/main" id="{75EB9B93-BB38-F4DA-68E3-9F14FB9393C2}"/>
+              </a:ext>
+            </a:extLst>
+          </p:cNvPr>
+          <p:cNvCxnSpPr>
+            <a:cxnSpLocks/>
+          </p:cNvCxnSpPr>
+          <p:nvPr/>
+        </p:nvCxnSpPr>
+        <p:spPr>
+          <a:xfrm>
+            <a:off x="1276946" y="2288085"/>
+            <a:ext cx="0" cy="257288"/>
+          </a:xfrm>
+          <a:prstGeom prst="straightConnector1">
+            <a:avLst/>
+          </a:prstGeom>
+          <a:ln w="19050">
+            <a:solidFill>
+              <a:srgbClr val="92D050"/>
+            </a:solidFill>
+            <a:tailEnd type="triangle"/>
+          </a:ln>
+        </p:spPr>
+        <p:style>
+          <a:lnRef idx="1">
+            <a:schemeClr val="accent1"/>
+          </a:lnRef>
+          <a:fillRef idx="0">
+            <a:schemeClr val="accent1"/>
+          </a:fillRef>
+          <a:effectRef idx="0">
+            <a:schemeClr val="accent1"/>
+          </a:effectRef>
+          <a:fontRef idx="minor">
+            <a:schemeClr val="tx1"/>
+          </a:fontRef>
+        </p:style>
+      </p:cxnSp>
+      <p:grpSp>
+        <p:nvGrpSpPr>
+          <p:cNvPr id="589" name="Group 66">
+            <a:extLst>
+              <a:ext uri="{FF2B5EF4-FFF2-40B4-BE49-F238E27FC236}">
+                <a16:creationId xmlns:a16="http://schemas.microsoft.com/office/drawing/2014/main" id="{6B4DB158-0EA2-D061-594B-B28E5FD1A0D5}"/>
+              </a:ext>
+            </a:extLst>
+          </p:cNvPr>
+          <p:cNvGrpSpPr/>
+          <p:nvPr/>
+        </p:nvGrpSpPr>
+        <p:grpSpPr>
+          <a:xfrm>
+            <a:off x="231276" y="2527791"/>
+            <a:ext cx="2091340" cy="2892507"/>
+            <a:chOff x="3017861" y="4222351"/>
+            <a:chExt cx="1917633" cy="2892507"/>
+          </a:xfrm>
+        </p:grpSpPr>
+        <p:sp>
+          <p:nvSpPr>
+            <p:cNvPr id="590" name="TextBox 589">
+              <a:extLst>
+                <a:ext uri="{FF2B5EF4-FFF2-40B4-BE49-F238E27FC236}">
+                  <a16:creationId xmlns:a16="http://schemas.microsoft.com/office/drawing/2014/main" id="{3146DF71-00E7-3742-C99F-5EE07B180A31}"/>
+                </a:ext>
+              </a:extLst>
+            </p:cNvPr>
+            <p:cNvSpPr txBox="1"/>
+            <p:nvPr/>
+          </p:nvSpPr>
+          <p:spPr>
+            <a:xfrm>
+              <a:off x="3017861" y="4560313"/>
+              <a:ext cx="1917633" cy="2554545"/>
+            </a:xfrm>
+            <a:prstGeom prst="rect">
+              <a:avLst/>
+            </a:prstGeom>
+            <a:noFill/>
+          </p:spPr>
+          <p:txBody>
+            <a:bodyPr wrap="square" rtlCol="0">
+              <a:spAutoFit/>
+            </a:bodyPr>
+            <a:lstStyle/>
+            <a:p>
+              <a:pPr algn="ctr"/>
+              <a:r>
+                <a:rPr lang="en-US" altLang="ko-KR" sz="800" b="1" u="sng">
+                  <a:cs typeface="Arial" pitchFamily="34" charset="0"/>
+                </a:rPr>
+                <a:t>[</a:t>
+              </a:r>
+              <a:r>
+                <a:rPr lang="ko-KR" altLang="en-US" sz="800" b="1" u="sng">
+                  <a:cs typeface="Arial" pitchFamily="34" charset="0"/>
+                </a:rPr>
+                <a:t>선수과목</a:t>
+              </a:r>
+              <a:r>
+                <a:rPr lang="en-US" altLang="ko-KR" sz="800" b="1" u="sng">
+                  <a:cs typeface="Arial" pitchFamily="34" charset="0"/>
+                </a:rPr>
+                <a:t>]</a:t>
+              </a:r>
+            </a:p>
+            <a:p>
+              <a:pPr algn="ctr"/>
+              <a:r>
+                <a:rPr lang="en-US" altLang="ko-KR" sz="800">
+                  <a:cs typeface="Arial" pitchFamily="34" charset="0"/>
+                </a:rPr>
+                <a:t>Data Science Tool</a:t>
+              </a:r>
+            </a:p>
+            <a:p>
+              <a:pPr algn="ctr"/>
+              <a:r>
+                <a:rPr lang="en-US" altLang="ko-KR" sz="800">
+                  <a:cs typeface="Arial" pitchFamily="34" charset="0"/>
+                </a:rPr>
+                <a:t>Data Science Prerequisites</a:t>
+              </a:r>
+            </a:p>
+            <a:p>
+              <a:pPr algn="ctr"/>
+              <a:r>
+                <a:rPr lang="en-US" altLang="ko-KR" sz="800">
+                  <a:cs typeface="Arial" pitchFamily="34" charset="0"/>
+                </a:rPr>
+                <a:t>Data Science Process</a:t>
+              </a:r>
+            </a:p>
+            <a:p>
+              <a:pPr algn="ctr"/>
+              <a:endParaRPr lang="en-US" altLang="ko-KR" sz="800">
+                <a:cs typeface="Arial" pitchFamily="34" charset="0"/>
+              </a:endParaRPr>
+            </a:p>
+            <a:p>
+              <a:pPr algn="ctr"/>
+              <a:r>
+                <a:rPr lang="en-US" altLang="ko-KR" sz="800" b="1" u="sng">
+                  <a:cs typeface="Arial" pitchFamily="34" charset="0"/>
+                </a:rPr>
+                <a:t>[</a:t>
+              </a:r>
+              <a:r>
+                <a:rPr lang="ko-KR" altLang="en-US" sz="800" b="1" u="sng">
+                  <a:cs typeface="Arial" pitchFamily="34" charset="0"/>
+                </a:rPr>
+                <a:t>목표</a:t>
+              </a:r>
+              <a:r>
+                <a:rPr lang="en-US" altLang="ko-KR" sz="800" b="1" u="sng">
+                  <a:cs typeface="Arial" pitchFamily="34" charset="0"/>
+                </a:rPr>
+                <a:t>: Data-driven AI Decision Making]</a:t>
+              </a:r>
+            </a:p>
+            <a:p>
+              <a:pPr algn="ctr"/>
+              <a:endParaRPr lang="en-US" altLang="ko-KR" sz="800" b="1">
+                <a:cs typeface="Arial" pitchFamily="34" charset="0"/>
+              </a:endParaRPr>
+            </a:p>
+            <a:p>
+              <a:r>
+                <a:rPr lang="en-US" altLang="ko-KR" sz="800" b="1">
+                  <a:cs typeface="Arial" pitchFamily="34" charset="0"/>
+                </a:rPr>
+                <a:t>(1) </a:t>
+              </a:r>
+              <a:r>
+                <a:rPr lang="ko-KR" altLang="en-US" sz="800" b="1">
+                  <a:cs typeface="Arial" pitchFamily="34" charset="0"/>
+                </a:rPr>
+                <a:t>디비애 과제 기반 </a:t>
+              </a:r>
+              <a:r>
+                <a:rPr lang="en-US" altLang="ko-KR" sz="800" b="1">
+                  <a:cs typeface="Arial" pitchFamily="34" charset="0"/>
+                </a:rPr>
+                <a:t>AI </a:t>
+              </a:r>
+              <a:r>
+                <a:rPr lang="ko-KR" altLang="en-US" sz="800" b="1">
+                  <a:cs typeface="Arial" pitchFamily="34" charset="0"/>
+                </a:rPr>
+                <a:t>고도화</a:t>
+              </a:r>
+              <a:r>
+                <a:rPr lang="en-US" altLang="ko-KR" sz="800" b="1">
+                  <a:cs typeface="Arial" pitchFamily="34" charset="0"/>
+                </a:rPr>
+                <a:t>(ML+DL)</a:t>
+              </a:r>
+            </a:p>
+            <a:p>
+              <a:pPr marL="171450" indent="-171450">
+                <a:buFontTx/>
+                <a:buChar char="-"/>
+              </a:pPr>
+              <a:r>
+                <a:rPr lang="en-US" altLang="ko-KR" sz="800" b="1">
+                  <a:cs typeface="Arial" pitchFamily="34" charset="0"/>
+                </a:rPr>
+                <a:t>Data Science Algorithms | </a:t>
+              </a:r>
+              <a:r>
+                <a:rPr lang="en-US" altLang="ko-KR" sz="800">
+                  <a:cs typeface="Arial" pitchFamily="34" charset="0"/>
+                </a:rPr>
+                <a:t>What are Machine Learning Algorithms for AI Engines?</a:t>
+              </a:r>
+            </a:p>
+            <a:p>
+              <a:pPr marL="171450" indent="-171450">
+                <a:buFontTx/>
+                <a:buChar char="-"/>
+              </a:pPr>
+              <a:r>
+                <a:rPr lang="en-US" altLang="ko-KR" sz="800" b="1">
+                  <a:cs typeface="Arial" pitchFamily="34" charset="0"/>
+                </a:rPr>
+                <a:t>Data Science Algorithms | </a:t>
+              </a:r>
+              <a:r>
+                <a:rPr lang="en-US" altLang="ko-KR" sz="800">
+                  <a:cs typeface="Arial" pitchFamily="34" charset="0"/>
+                </a:rPr>
+                <a:t>What are Deep Learning Algorithms for AI Engines?</a:t>
+              </a:r>
+              <a:endParaRPr lang="en-US" altLang="ko-KR" sz="800" b="1">
+                <a:cs typeface="Arial" pitchFamily="34" charset="0"/>
+              </a:endParaRPr>
+            </a:p>
+            <a:p>
+              <a:endParaRPr lang="en-US" altLang="ko-KR" sz="800" b="1">
+                <a:cs typeface="Arial" pitchFamily="34" charset="0"/>
+              </a:endParaRPr>
+            </a:p>
+            <a:p>
+              <a:r>
+                <a:rPr lang="en-US" altLang="ko-KR" sz="800" b="1">
+                  <a:cs typeface="Arial" pitchFamily="34" charset="0"/>
+                </a:rPr>
+                <a:t>(2) </a:t>
+              </a:r>
+              <a:r>
+                <a:rPr lang="ko-KR" altLang="en-US" sz="800" b="1">
+                  <a:cs typeface="Arial" pitchFamily="34" charset="0"/>
+                </a:rPr>
+                <a:t>시계열 및 텍스트 기반 </a:t>
+              </a:r>
+              <a:r>
+                <a:rPr lang="en-US" altLang="ko-KR" sz="800" b="1">
+                  <a:cs typeface="Arial" pitchFamily="34" charset="0"/>
+                </a:rPr>
+                <a:t>AI </a:t>
+              </a:r>
+              <a:r>
+                <a:rPr lang="ko-KR" altLang="en-US" sz="800" b="1">
+                  <a:cs typeface="Arial" pitchFamily="34" charset="0"/>
+                </a:rPr>
+                <a:t>의사결정</a:t>
+              </a:r>
+              <a:endParaRPr lang="en-US" altLang="ko-KR" sz="800" b="1">
+                <a:cs typeface="Arial" pitchFamily="34" charset="0"/>
+              </a:endParaRPr>
+            </a:p>
+            <a:p>
+              <a:pPr marL="171450" indent="-171450">
+                <a:buFontTx/>
+                <a:buChar char="-"/>
+              </a:pPr>
+              <a:r>
+                <a:rPr lang="en-US" altLang="ko-KR" sz="800" b="1">
+                  <a:cs typeface="Arial" pitchFamily="34" charset="0"/>
+                </a:rPr>
+                <a:t>Data Science Process + Algorithms | </a:t>
+              </a:r>
+              <a:r>
+                <a:rPr lang="en-US" altLang="ko-KR" sz="800">
+                  <a:cs typeface="Arial" pitchFamily="34" charset="0"/>
+                </a:rPr>
+                <a:t>How Do We Solve the Time Dependency Problem?</a:t>
+              </a:r>
+            </a:p>
+            <a:p>
+              <a:pPr algn="ctr"/>
+              <a:endParaRPr lang="en-US" altLang="ko-KR" sz="800">
+                <a:cs typeface="Arial" pitchFamily="34" charset="0"/>
+              </a:endParaRPr>
+            </a:p>
+          </p:txBody>
+        </p:sp>
+        <p:sp>
+          <p:nvSpPr>
+            <p:cNvPr id="591" name="TextBox 590">
+              <a:extLst>
+                <a:ext uri="{FF2B5EF4-FFF2-40B4-BE49-F238E27FC236}">
+                  <a16:creationId xmlns:a16="http://schemas.microsoft.com/office/drawing/2014/main" id="{56FB0413-6CDE-0BB7-03E7-8CC722A6ADD1}"/>
+                </a:ext>
+              </a:extLst>
+            </p:cNvPr>
+            <p:cNvSpPr txBox="1"/>
+            <p:nvPr/>
+          </p:nvSpPr>
+          <p:spPr>
+            <a:xfrm>
+              <a:off x="3017861" y="4222351"/>
+              <a:ext cx="1901330" cy="307777"/>
+            </a:xfrm>
+            <a:prstGeom prst="rect">
+              <a:avLst/>
+            </a:prstGeom>
+            <a:noFill/>
+          </p:spPr>
+          <p:txBody>
+            <a:bodyPr wrap="square" rtlCol="0">
+              <a:spAutoFit/>
+            </a:bodyPr>
+            <a:lstStyle/>
+            <a:p>
+              <a:pPr algn="ctr"/>
+              <a:r>
+                <a:rPr lang="en-US" altLang="ko-KR" b="1">
+                  <a:solidFill>
+                    <a:srgbClr val="92D050"/>
+                  </a:solidFill>
+                  <a:cs typeface="Arial" pitchFamily="34" charset="0"/>
+                </a:rPr>
+                <a:t>Study</a:t>
+              </a:r>
+              <a:r>
+                <a:rPr lang="ko-KR" altLang="en-US" b="1">
+                  <a:solidFill>
+                    <a:srgbClr val="92D050"/>
+                  </a:solidFill>
+                  <a:cs typeface="Arial" pitchFamily="34" charset="0"/>
+                </a:rPr>
+                <a:t> </a:t>
+              </a:r>
+              <a:r>
+                <a:rPr lang="en-US" altLang="ko-KR" b="1">
+                  <a:solidFill>
+                    <a:srgbClr val="92D050"/>
+                  </a:solidFill>
+                  <a:cs typeface="Arial" pitchFamily="34" charset="0"/>
+                </a:rPr>
+                <a:t>Diving</a:t>
+              </a:r>
+              <a:endParaRPr lang="ko-KR" altLang="en-US" sz="1400" b="1" dirty="0">
+                <a:solidFill>
+                  <a:srgbClr val="92D050"/>
+                </a:solidFill>
+                <a:cs typeface="Arial" pitchFamily="34" charset="0"/>
+              </a:endParaRPr>
+            </a:p>
+          </p:txBody>
+        </p:sp>
+      </p:grpSp>
+      <p:sp>
+        <p:nvSpPr>
+          <p:cNvPr id="651" name="화살표: 갈매기형 수장 650">
+            <a:extLst>
+              <a:ext uri="{FF2B5EF4-FFF2-40B4-BE49-F238E27FC236}">
+                <a16:creationId xmlns:a16="http://schemas.microsoft.com/office/drawing/2014/main" id="{41956D5F-83F6-BB88-B0DB-EEE2D9F12232}"/>
+              </a:ext>
+            </a:extLst>
+          </p:cNvPr>
+          <p:cNvSpPr/>
+          <p:nvPr/>
+        </p:nvSpPr>
+        <p:spPr>
+          <a:xfrm>
+            <a:off x="2322615" y="1713768"/>
+            <a:ext cx="2342874" cy="515566"/>
+          </a:xfrm>
+          <a:prstGeom prst="chevron">
+            <a:avLst>
+              <a:gd name="adj" fmla="val 53644"/>
+            </a:avLst>
+          </a:prstGeom>
+          <a:solidFill>
+            <a:srgbClr val="FFC000"/>
+          </a:solidFill>
+          <a:ln>
+            <a:noFill/>
+          </a:ln>
+        </p:spPr>
+        <p:style>
+          <a:lnRef idx="2">
+            <a:schemeClr val="accent1">
+              <a:shade val="50000"/>
+            </a:schemeClr>
+          </a:lnRef>
+          <a:fillRef idx="1">
+            <a:schemeClr val="accent1"/>
+          </a:fillRef>
+          <a:effectRef idx="0">
+            <a:schemeClr val="accent1"/>
+          </a:effectRef>
+          <a:fontRef idx="minor">
+            <a:schemeClr val="lt1"/>
+          </a:fontRef>
+        </p:style>
+        <p:txBody>
+          <a:bodyPr rtlCol="0" anchor="ctr"/>
+          <a:lstStyle/>
+          <a:p>
+            <a:pPr algn="ctr"/>
+            <a:endParaRPr lang="ko-KR" altLang="en-US"/>
+          </a:p>
+        </p:txBody>
+      </p:sp>
+      <p:sp>
+        <p:nvSpPr>
+          <p:cNvPr id="652" name="TextBox 651">
+            <a:extLst>
+              <a:ext uri="{FF2B5EF4-FFF2-40B4-BE49-F238E27FC236}">
+                <a16:creationId xmlns:a16="http://schemas.microsoft.com/office/drawing/2014/main" id="{7EA36589-2683-7C04-C93C-D5A775E7AAB8}"/>
+              </a:ext>
+            </a:extLst>
+          </p:cNvPr>
+          <p:cNvSpPr txBox="1"/>
+          <p:nvPr/>
+        </p:nvSpPr>
+        <p:spPr>
+          <a:xfrm>
+            <a:off x="2598712" y="1628864"/>
+            <a:ext cx="1772348" cy="646331"/>
+          </a:xfrm>
+          <a:prstGeom prst="rect">
+            <a:avLst/>
+          </a:prstGeom>
+          <a:noFill/>
+        </p:spPr>
+        <p:txBody>
+          <a:bodyPr wrap="square" rtlCol="0">
+            <a:spAutoFit/>
+          </a:bodyPr>
+          <a:lstStyle/>
+          <a:p>
+            <a:pPr algn="ctr"/>
+            <a:r>
+              <a:rPr lang="en-US" altLang="ko-KR" sz="1800" b="1">
+                <a:solidFill>
+                  <a:schemeClr val="bg1"/>
+                </a:solidFill>
+              </a:rPr>
+              <a:t>2025 4Q</a:t>
+            </a:r>
+          </a:p>
+          <a:p>
+            <a:pPr algn="ctr"/>
+            <a:r>
+              <a:rPr lang="en-US" altLang="ko-KR" sz="1800" b="1">
+                <a:solidFill>
+                  <a:schemeClr val="bg1"/>
+                </a:solidFill>
+              </a:rPr>
+              <a:t>(9~12M)</a:t>
+            </a:r>
+            <a:endParaRPr lang="ko-KR" altLang="en-US" sz="1800" b="1" dirty="0">
+              <a:solidFill>
+                <a:schemeClr val="bg1"/>
+              </a:solidFill>
+            </a:endParaRPr>
+          </a:p>
+        </p:txBody>
+      </p:sp>
+      <p:grpSp>
+        <p:nvGrpSpPr>
+          <p:cNvPr id="654" name="Group 66">
+            <a:extLst>
+              <a:ext uri="{FF2B5EF4-FFF2-40B4-BE49-F238E27FC236}">
+                <a16:creationId xmlns:a16="http://schemas.microsoft.com/office/drawing/2014/main" id="{359A7558-4A8F-E46F-9381-59B39FDA85EA}"/>
+              </a:ext>
+            </a:extLst>
+          </p:cNvPr>
+          <p:cNvGrpSpPr/>
+          <p:nvPr/>
+        </p:nvGrpSpPr>
+        <p:grpSpPr>
+          <a:xfrm>
+            <a:off x="2448382" y="2527791"/>
+            <a:ext cx="2091340" cy="2892507"/>
+            <a:chOff x="3017861" y="4222351"/>
+            <a:chExt cx="1917633" cy="2892507"/>
+          </a:xfrm>
+        </p:grpSpPr>
+        <p:sp>
+          <p:nvSpPr>
+            <p:cNvPr id="655" name="TextBox 654">
+              <a:extLst>
+                <a:ext uri="{FF2B5EF4-FFF2-40B4-BE49-F238E27FC236}">
+                  <a16:creationId xmlns:a16="http://schemas.microsoft.com/office/drawing/2014/main" id="{A7E91FC0-6CBC-8CBF-3816-C721318A3D99}"/>
+                </a:ext>
+              </a:extLst>
+            </p:cNvPr>
+            <p:cNvSpPr txBox="1"/>
+            <p:nvPr/>
+          </p:nvSpPr>
+          <p:spPr>
+            <a:xfrm>
+              <a:off x="3017861" y="4560313"/>
+              <a:ext cx="1917633" cy="2554545"/>
+            </a:xfrm>
+            <a:prstGeom prst="rect">
+              <a:avLst/>
+            </a:prstGeom>
+            <a:noFill/>
+          </p:spPr>
+          <p:txBody>
+            <a:bodyPr wrap="square" rtlCol="0">
+              <a:spAutoFit/>
+            </a:bodyPr>
+            <a:lstStyle/>
+            <a:p>
+              <a:pPr algn="ctr"/>
+              <a:r>
+                <a:rPr lang="en-US" altLang="ko-KR" sz="800" b="1" u="sng">
+                  <a:cs typeface="Arial" pitchFamily="34" charset="0"/>
+                </a:rPr>
+                <a:t>[</a:t>
+              </a:r>
+              <a:r>
+                <a:rPr lang="ko-KR" altLang="en-US" sz="800" b="1" u="sng">
+                  <a:cs typeface="Arial" pitchFamily="34" charset="0"/>
+                </a:rPr>
+                <a:t>선수과목</a:t>
+              </a:r>
+              <a:r>
+                <a:rPr lang="en-US" altLang="ko-KR" sz="800" b="1" u="sng">
+                  <a:cs typeface="Arial" pitchFamily="34" charset="0"/>
+                </a:rPr>
+                <a:t>]</a:t>
+              </a:r>
+            </a:p>
+            <a:p>
+              <a:pPr algn="ctr"/>
+              <a:r>
+                <a:rPr lang="en-US" altLang="ko-KR" sz="800">
+                  <a:cs typeface="Arial" pitchFamily="34" charset="0"/>
+                </a:rPr>
+                <a:t>Study</a:t>
+              </a:r>
+              <a:r>
+                <a:rPr lang="ko-KR" altLang="en-US" sz="800">
+                  <a:cs typeface="Arial" pitchFamily="34" charset="0"/>
+                </a:rPr>
+                <a:t> </a:t>
+              </a:r>
+              <a:r>
+                <a:rPr lang="en-US" altLang="ko-KR" sz="800">
+                  <a:cs typeface="Arial" pitchFamily="34" charset="0"/>
+                </a:rPr>
+                <a:t>Diving</a:t>
+              </a:r>
+            </a:p>
+            <a:p>
+              <a:pPr algn="ctr"/>
+              <a:endParaRPr lang="en-US" altLang="ko-KR" sz="800">
+                <a:cs typeface="Arial" pitchFamily="34" charset="0"/>
+              </a:endParaRPr>
+            </a:p>
+            <a:p>
+              <a:pPr algn="ctr"/>
+              <a:endParaRPr lang="en-US" altLang="ko-KR" sz="800">
+                <a:cs typeface="Arial" pitchFamily="34" charset="0"/>
+              </a:endParaRPr>
+            </a:p>
+            <a:p>
+              <a:pPr algn="ctr"/>
+              <a:endParaRPr lang="en-US" altLang="ko-KR" sz="800">
+                <a:cs typeface="Arial" pitchFamily="34" charset="0"/>
+              </a:endParaRPr>
+            </a:p>
+            <a:p>
+              <a:pPr algn="ctr"/>
+              <a:r>
+                <a:rPr lang="en-US" altLang="ko-KR" sz="800" b="1" u="sng">
+                  <a:cs typeface="Arial" pitchFamily="34" charset="0"/>
+                </a:rPr>
+                <a:t>[</a:t>
+              </a:r>
+              <a:r>
+                <a:rPr lang="ko-KR" altLang="en-US" sz="800" b="1" u="sng">
+                  <a:cs typeface="Arial" pitchFamily="34" charset="0"/>
+                </a:rPr>
+                <a:t>목표</a:t>
+              </a:r>
+              <a:r>
+                <a:rPr lang="en-US" altLang="ko-KR" sz="800" b="1" u="sng">
+                  <a:cs typeface="Arial" pitchFamily="34" charset="0"/>
+                </a:rPr>
+                <a:t>: AI as a Service]</a:t>
+              </a:r>
+            </a:p>
+            <a:p>
+              <a:pPr algn="ctr"/>
+              <a:endParaRPr lang="en-US" altLang="ko-KR" sz="800" b="1">
+                <a:cs typeface="Arial" pitchFamily="34" charset="0"/>
+              </a:endParaRPr>
+            </a:p>
+            <a:p>
+              <a:r>
+                <a:rPr lang="en-US" altLang="ko-KR" sz="800" b="1">
+                  <a:cs typeface="Arial" pitchFamily="34" charset="0"/>
+                </a:rPr>
+                <a:t>(1) Data Engineering with</a:t>
+              </a:r>
+              <a:r>
+                <a:rPr lang="ko-KR" altLang="en-US" sz="800" b="1">
+                  <a:cs typeface="Arial" pitchFamily="34" charset="0"/>
+                </a:rPr>
+                <a:t> </a:t>
+              </a:r>
+              <a:r>
+                <a:rPr lang="en-US" altLang="ko-KR" sz="800" b="1">
+                  <a:cs typeface="Arial" pitchFamily="34" charset="0"/>
+                </a:rPr>
+                <a:t>AI</a:t>
+              </a:r>
+            </a:p>
+            <a:p>
+              <a:pPr marL="171450" indent="-171450">
+                <a:buFontTx/>
+                <a:buChar char="-"/>
+              </a:pPr>
+              <a:r>
+                <a:rPr lang="ko-KR" altLang="en-US" sz="800">
+                  <a:cs typeface="Arial" pitchFamily="34" charset="0"/>
+                </a:rPr>
+                <a:t>누구에게 마케팅을 해야할 것인가</a:t>
+              </a:r>
+              <a:r>
+                <a:rPr lang="en-US" altLang="ko-KR" sz="800">
+                  <a:cs typeface="Arial" pitchFamily="34" charset="0"/>
+                </a:rPr>
+                <a:t>? </a:t>
+              </a:r>
+              <a:r>
+                <a:rPr lang="ko-KR" altLang="en-US" sz="800">
+                  <a:cs typeface="Arial" pitchFamily="34" charset="0"/>
+                </a:rPr>
+                <a:t>설명가능한 인공지능을 활용한 추천과 근거</a:t>
+              </a:r>
+              <a:endParaRPr lang="en-US" altLang="ko-KR" sz="800">
+                <a:cs typeface="Arial" pitchFamily="34" charset="0"/>
+              </a:endParaRPr>
+            </a:p>
+            <a:p>
+              <a:pPr marL="171450" indent="-171450">
+                <a:buFontTx/>
+                <a:buChar char="-"/>
+              </a:pPr>
+              <a:r>
+                <a:rPr lang="ko-KR" altLang="en-US" sz="800">
+                  <a:cs typeface="Arial" pitchFamily="34" charset="0"/>
+                </a:rPr>
+                <a:t>자동화</a:t>
+              </a:r>
+              <a:r>
+                <a:rPr lang="en-US" altLang="ko-KR" sz="800">
+                  <a:cs typeface="Arial" pitchFamily="34" charset="0"/>
+                </a:rPr>
+                <a:t>: Data Merge + ML/DL + SHAP</a:t>
+              </a:r>
+              <a:endParaRPr lang="ko-KR" altLang="en-US" sz="800">
+                <a:cs typeface="Arial" pitchFamily="34" charset="0"/>
+              </a:endParaRPr>
+            </a:p>
+            <a:p>
+              <a:endParaRPr lang="en-US" altLang="ko-KR" sz="800" b="1">
+                <a:cs typeface="Arial" pitchFamily="34" charset="0"/>
+              </a:endParaRPr>
+            </a:p>
+            <a:p>
+              <a:r>
+                <a:rPr lang="en-US" altLang="ko-KR" sz="800" b="1">
+                  <a:cs typeface="Arial" pitchFamily="34" charset="0"/>
+                </a:rPr>
+                <a:t>(2) Forecasting with</a:t>
+              </a:r>
+              <a:r>
+                <a:rPr lang="ko-KR" altLang="en-US" sz="800" b="1">
+                  <a:cs typeface="Arial" pitchFamily="34" charset="0"/>
+                </a:rPr>
+                <a:t> </a:t>
+              </a:r>
+              <a:r>
+                <a:rPr lang="en-US" altLang="ko-KR" sz="800" b="1">
+                  <a:cs typeface="Arial" pitchFamily="34" charset="0"/>
+                </a:rPr>
+                <a:t>AI</a:t>
+              </a:r>
+            </a:p>
+            <a:p>
+              <a:pPr marL="171450" indent="-171450">
+                <a:buFontTx/>
+                <a:buChar char="-"/>
+              </a:pPr>
+              <a:r>
+                <a:rPr lang="ko-KR" altLang="en-US" sz="800">
+                  <a:cs typeface="Arial" pitchFamily="34" charset="0"/>
+                </a:rPr>
+                <a:t>비즈니스 수요를 정확하게 예측해볼까</a:t>
+              </a:r>
+              <a:r>
+                <a:rPr lang="en-US" altLang="ko-KR" sz="800">
+                  <a:cs typeface="Arial" pitchFamily="34" charset="0"/>
+                </a:rPr>
+                <a:t>? </a:t>
+              </a:r>
+              <a:r>
+                <a:rPr lang="ko-KR" altLang="en-US" sz="800">
+                  <a:cs typeface="Arial" pitchFamily="34" charset="0"/>
+                </a:rPr>
+                <a:t>시계열 및 텍스트 형태로 구성된 경제지표와 뉴스데이터 융합을 통한 미래예측</a:t>
+              </a:r>
+              <a:endParaRPr lang="en-US" altLang="ko-KR" sz="800">
+                <a:cs typeface="Arial" pitchFamily="34" charset="0"/>
+              </a:endParaRPr>
+            </a:p>
+            <a:p>
+              <a:pPr marL="171450" indent="-171450">
+                <a:buFontTx/>
+                <a:buChar char="-"/>
+              </a:pPr>
+              <a:r>
+                <a:rPr lang="ko-KR" altLang="en-US" sz="800">
+                  <a:cs typeface="Arial" pitchFamily="34" charset="0"/>
+                </a:rPr>
+                <a:t>자동화</a:t>
+              </a:r>
+              <a:r>
+                <a:rPr lang="en-US" altLang="ko-KR" sz="800">
+                  <a:cs typeface="Arial" pitchFamily="34" charset="0"/>
+                </a:rPr>
+                <a:t>: Text Mining + ML/DL</a:t>
+              </a:r>
+            </a:p>
+            <a:p>
+              <a:pPr algn="ctr"/>
+              <a:endParaRPr lang="en-US" altLang="ko-KR" sz="800">
+                <a:cs typeface="Arial" pitchFamily="34" charset="0"/>
+              </a:endParaRPr>
+            </a:p>
+          </p:txBody>
+        </p:sp>
+        <p:sp>
+          <p:nvSpPr>
+            <p:cNvPr id="656" name="TextBox 655">
+              <a:extLst>
+                <a:ext uri="{FF2B5EF4-FFF2-40B4-BE49-F238E27FC236}">
+                  <a16:creationId xmlns:a16="http://schemas.microsoft.com/office/drawing/2014/main" id="{A25EB800-5657-72DE-F6FC-7488847AA3C4}"/>
+                </a:ext>
+              </a:extLst>
+            </p:cNvPr>
+            <p:cNvSpPr txBox="1"/>
+            <p:nvPr/>
+          </p:nvSpPr>
+          <p:spPr>
+            <a:xfrm>
+              <a:off x="3017861" y="4222351"/>
+              <a:ext cx="1901330" cy="307777"/>
+            </a:xfrm>
+            <a:prstGeom prst="rect">
+              <a:avLst/>
+            </a:prstGeom>
+            <a:noFill/>
+          </p:spPr>
+          <p:txBody>
+            <a:bodyPr wrap="square" rtlCol="0">
+              <a:spAutoFit/>
+            </a:bodyPr>
+            <a:lstStyle/>
+            <a:p>
+              <a:pPr algn="ctr"/>
+              <a:r>
+                <a:rPr lang="en-US" altLang="ko-KR" sz="1400" b="1">
+                  <a:solidFill>
+                    <a:srgbClr val="FFC000"/>
+                  </a:solidFill>
+                  <a:cs typeface="Arial" pitchFamily="34" charset="0"/>
+                </a:rPr>
+                <a:t>Project Diving</a:t>
+              </a:r>
+              <a:endParaRPr lang="ko-KR" altLang="en-US" sz="1400" b="1" dirty="0">
+                <a:solidFill>
+                  <a:srgbClr val="FFC000"/>
+                </a:solidFill>
+                <a:cs typeface="Arial" pitchFamily="34" charset="0"/>
+              </a:endParaRPr>
+            </a:p>
+          </p:txBody>
+        </p:sp>
+      </p:grpSp>
+      <p:sp>
+        <p:nvSpPr>
+          <p:cNvPr id="707" name="화살표: 갈매기형 수장 706">
+            <a:extLst>
+              <a:ext uri="{FF2B5EF4-FFF2-40B4-BE49-F238E27FC236}">
+                <a16:creationId xmlns:a16="http://schemas.microsoft.com/office/drawing/2014/main" id="{431FDFAC-9B93-C1AD-C930-A7B00848EA99}"/>
+              </a:ext>
+            </a:extLst>
+          </p:cNvPr>
+          <p:cNvSpPr/>
+          <p:nvPr/>
+        </p:nvSpPr>
+        <p:spPr>
+          <a:xfrm>
+            <a:off x="4521389" y="1713768"/>
+            <a:ext cx="2342874" cy="515566"/>
+          </a:xfrm>
+          <a:prstGeom prst="chevron">
+            <a:avLst/>
+          </a:prstGeom>
+          <a:solidFill>
+            <a:srgbClr val="7030A0"/>
+          </a:solidFill>
+          <a:ln>
+            <a:noFill/>
+          </a:ln>
+        </p:spPr>
+        <p:style>
+          <a:lnRef idx="2">
+            <a:schemeClr val="accent1">
+              <a:shade val="50000"/>
+            </a:schemeClr>
+          </a:lnRef>
+          <a:fillRef idx="1">
+            <a:schemeClr val="accent1"/>
+          </a:fillRef>
+          <a:effectRef idx="0">
+            <a:schemeClr val="accent1"/>
+          </a:effectRef>
+          <a:fontRef idx="minor">
+            <a:schemeClr val="lt1"/>
+          </a:fontRef>
+        </p:style>
+        <p:txBody>
+          <a:bodyPr rtlCol="0" anchor="ctr"/>
+          <a:lstStyle/>
+          <a:p>
+            <a:pPr algn="ctr"/>
+            <a:endParaRPr lang="ko-KR" altLang="en-US"/>
+          </a:p>
+        </p:txBody>
+      </p:sp>
+      <p:sp>
+        <p:nvSpPr>
+          <p:cNvPr id="708" name="TextBox 707">
+            <a:extLst>
+              <a:ext uri="{FF2B5EF4-FFF2-40B4-BE49-F238E27FC236}">
+                <a16:creationId xmlns:a16="http://schemas.microsoft.com/office/drawing/2014/main" id="{C25BE077-11B2-D10B-BEA7-07EF1F291D37}"/>
+              </a:ext>
+            </a:extLst>
+          </p:cNvPr>
+          <p:cNvSpPr txBox="1"/>
+          <p:nvPr/>
+        </p:nvSpPr>
+        <p:spPr>
+          <a:xfrm>
+            <a:off x="4797486" y="1628864"/>
+            <a:ext cx="1772348" cy="646331"/>
+          </a:xfrm>
+          <a:prstGeom prst="rect">
+            <a:avLst/>
+          </a:prstGeom>
+          <a:noFill/>
+        </p:spPr>
+        <p:txBody>
+          <a:bodyPr wrap="square" rtlCol="0">
+            <a:spAutoFit/>
+          </a:bodyPr>
+          <a:lstStyle/>
+          <a:p>
+            <a:pPr algn="ctr"/>
+            <a:r>
+              <a:rPr lang="en-US" altLang="ko-KR" sz="1800" b="1">
+                <a:solidFill>
+                  <a:schemeClr val="bg1"/>
+                </a:solidFill>
+              </a:rPr>
+              <a:t>2026 1Q</a:t>
+            </a:r>
+          </a:p>
+          <a:p>
+            <a:pPr algn="ctr"/>
+            <a:r>
+              <a:rPr lang="en-US" altLang="ko-KR" sz="1800" b="1">
+                <a:solidFill>
+                  <a:schemeClr val="bg1"/>
+                </a:solidFill>
+              </a:rPr>
+              <a:t>(1~2M)</a:t>
+            </a:r>
+            <a:endParaRPr lang="ko-KR" altLang="en-US" sz="1800" b="1" dirty="0">
+              <a:solidFill>
+                <a:schemeClr val="bg1"/>
+              </a:solidFill>
+            </a:endParaRPr>
+          </a:p>
+        </p:txBody>
+      </p:sp>
+      <p:grpSp>
+        <p:nvGrpSpPr>
+          <p:cNvPr id="710" name="Group 66">
+            <a:extLst>
+              <a:ext uri="{FF2B5EF4-FFF2-40B4-BE49-F238E27FC236}">
+                <a16:creationId xmlns:a16="http://schemas.microsoft.com/office/drawing/2014/main" id="{B84B2EF3-1323-3BD4-235C-1D5EEC0E72DE}"/>
+              </a:ext>
+            </a:extLst>
+          </p:cNvPr>
+          <p:cNvGrpSpPr/>
+          <p:nvPr/>
+        </p:nvGrpSpPr>
+        <p:grpSpPr>
+          <a:xfrm>
+            <a:off x="4647156" y="2527791"/>
+            <a:ext cx="2091340" cy="2276954"/>
+            <a:chOff x="3017861" y="4222351"/>
+            <a:chExt cx="1917633" cy="2276954"/>
+          </a:xfrm>
+        </p:grpSpPr>
+        <p:sp>
+          <p:nvSpPr>
+            <p:cNvPr id="711" name="TextBox 710">
+              <a:extLst>
+                <a:ext uri="{FF2B5EF4-FFF2-40B4-BE49-F238E27FC236}">
+                  <a16:creationId xmlns:a16="http://schemas.microsoft.com/office/drawing/2014/main" id="{04610316-B86B-F727-DB3D-82CCFAD74955}"/>
+                </a:ext>
+              </a:extLst>
+            </p:cNvPr>
+            <p:cNvSpPr txBox="1"/>
+            <p:nvPr/>
+          </p:nvSpPr>
+          <p:spPr>
+            <a:xfrm>
+              <a:off x="3017861" y="4560313"/>
+              <a:ext cx="1917633" cy="1938992"/>
+            </a:xfrm>
+            <a:prstGeom prst="rect">
+              <a:avLst/>
+            </a:prstGeom>
+            <a:noFill/>
+          </p:spPr>
+          <p:txBody>
+            <a:bodyPr wrap="square" rtlCol="0">
+              <a:spAutoFit/>
+            </a:bodyPr>
+            <a:lstStyle/>
+            <a:p>
+              <a:pPr algn="ctr"/>
+              <a:r>
+                <a:rPr lang="en-US" altLang="ko-KR" sz="800" b="1" u="sng">
+                  <a:cs typeface="Arial" pitchFamily="34" charset="0"/>
+                </a:rPr>
+                <a:t>[</a:t>
+              </a:r>
+              <a:r>
+                <a:rPr lang="ko-KR" altLang="en-US" sz="800" b="1" u="sng">
+                  <a:cs typeface="Arial" pitchFamily="34" charset="0"/>
+                </a:rPr>
+                <a:t>선수과목</a:t>
+              </a:r>
+              <a:r>
+                <a:rPr lang="en-US" altLang="ko-KR" sz="800" b="1" u="sng">
+                  <a:cs typeface="Arial" pitchFamily="34" charset="0"/>
+                </a:rPr>
+                <a:t>]</a:t>
+              </a:r>
+            </a:p>
+            <a:p>
+              <a:pPr algn="ctr"/>
+              <a:r>
+                <a:rPr lang="en-US" altLang="ko-KR" sz="800">
+                  <a:cs typeface="Arial" pitchFamily="34" charset="0"/>
+                </a:rPr>
+                <a:t>Project Diving</a:t>
+              </a:r>
+            </a:p>
+            <a:p>
+              <a:pPr algn="ctr"/>
+              <a:endParaRPr lang="en-US" altLang="ko-KR" sz="800">
+                <a:cs typeface="Arial" pitchFamily="34" charset="0"/>
+              </a:endParaRPr>
+            </a:p>
+            <a:p>
+              <a:pPr algn="ctr"/>
+              <a:endParaRPr lang="en-US" altLang="ko-KR" sz="800">
+                <a:cs typeface="Arial" pitchFamily="34" charset="0"/>
+              </a:endParaRPr>
+            </a:p>
+            <a:p>
+              <a:pPr algn="ctr"/>
+              <a:endParaRPr lang="en-US" altLang="ko-KR" sz="800">
+                <a:cs typeface="Arial" pitchFamily="34" charset="0"/>
+              </a:endParaRPr>
+            </a:p>
+            <a:p>
+              <a:pPr algn="ctr"/>
+              <a:r>
+                <a:rPr lang="en-US" altLang="ko-KR" sz="800" b="1" u="sng">
+                  <a:cs typeface="Arial" pitchFamily="34" charset="0"/>
+                </a:rPr>
+                <a:t>[</a:t>
+              </a:r>
+              <a:r>
+                <a:rPr lang="ko-KR" altLang="en-US" sz="800" b="1" u="sng">
+                  <a:cs typeface="Arial" pitchFamily="34" charset="0"/>
+                </a:rPr>
+                <a:t>목표</a:t>
+              </a:r>
+              <a:r>
+                <a:rPr lang="en-US" altLang="ko-KR" sz="800" b="1" u="sng">
+                  <a:cs typeface="Arial" pitchFamily="34" charset="0"/>
+                </a:rPr>
+                <a:t>: </a:t>
+              </a:r>
+              <a:r>
+                <a:rPr lang="ko-KR" altLang="en-US" sz="800" b="1" u="sng">
+                  <a:cs typeface="Arial" pitchFamily="34" charset="0"/>
+                </a:rPr>
+                <a:t>개인 브랜딩 선행</a:t>
+              </a:r>
+              <a:r>
+                <a:rPr lang="en-US" altLang="ko-KR" sz="800" b="1" u="sng">
+                  <a:cs typeface="Arial" pitchFamily="34" charset="0"/>
+                </a:rPr>
+                <a:t>]</a:t>
+              </a:r>
+            </a:p>
+            <a:p>
+              <a:pPr algn="ctr"/>
+              <a:endParaRPr lang="en-US" altLang="ko-KR" sz="800" b="1">
+                <a:cs typeface="Arial" pitchFamily="34" charset="0"/>
+              </a:endParaRPr>
+            </a:p>
+            <a:p>
+              <a:r>
+                <a:rPr lang="en-US" altLang="ko-KR" sz="800" b="1">
+                  <a:cs typeface="Arial" pitchFamily="34" charset="0"/>
+                </a:rPr>
+                <a:t>(1) </a:t>
+              </a:r>
+              <a:r>
+                <a:rPr lang="ko-KR" altLang="en-US" sz="800" b="1">
+                  <a:cs typeface="Arial" pitchFamily="34" charset="0"/>
+                </a:rPr>
+                <a:t>전문가 방향 설정</a:t>
+              </a:r>
+              <a:r>
+                <a:rPr lang="en-US" altLang="ko-KR" sz="800" b="1">
+                  <a:cs typeface="Arial" pitchFamily="34" charset="0"/>
+                </a:rPr>
+                <a:t>: </a:t>
+              </a:r>
+            </a:p>
+            <a:p>
+              <a:pPr marL="171450" indent="-171450">
+                <a:buFontTx/>
+                <a:buChar char="-"/>
+              </a:pPr>
+              <a:r>
+                <a:rPr lang="ko-KR" altLang="en-US" sz="800">
+                  <a:cs typeface="Arial" pitchFamily="34" charset="0"/>
+                </a:rPr>
+                <a:t>기업</a:t>
+              </a:r>
+              <a:r>
+                <a:rPr lang="en-US" altLang="ko-KR" sz="800">
+                  <a:cs typeface="Arial" pitchFamily="34" charset="0"/>
+                </a:rPr>
+                <a:t>/</a:t>
+              </a:r>
+              <a:r>
+                <a:rPr lang="ko-KR" altLang="en-US" sz="800">
+                  <a:cs typeface="Arial" pitchFamily="34" charset="0"/>
+                </a:rPr>
+                <a:t>사회 주요 문제</a:t>
+              </a:r>
+              <a:r>
+                <a:rPr lang="en-US" altLang="ko-KR" sz="800">
+                  <a:cs typeface="Arial" pitchFamily="34" charset="0"/>
+                </a:rPr>
+                <a:t>(</a:t>
+              </a:r>
+              <a:r>
+                <a:rPr lang="ko-KR" altLang="en-US" sz="800">
+                  <a:cs typeface="Arial" pitchFamily="34" charset="0"/>
+                </a:rPr>
+                <a:t>공모전</a:t>
+              </a:r>
+              <a:r>
+                <a:rPr lang="en-US" altLang="ko-KR" sz="800">
+                  <a:cs typeface="Arial" pitchFamily="34" charset="0"/>
+                </a:rPr>
+                <a:t>/</a:t>
+              </a:r>
+              <a:r>
+                <a:rPr lang="ko-KR" altLang="en-US" sz="800">
+                  <a:cs typeface="Arial" pitchFamily="34" charset="0"/>
+                </a:rPr>
+                <a:t>논문 등</a:t>
+              </a:r>
+              <a:r>
+                <a:rPr lang="en-US" altLang="ko-KR" sz="800">
+                  <a:cs typeface="Arial" pitchFamily="34" charset="0"/>
+                </a:rPr>
+                <a:t>)</a:t>
+              </a:r>
+            </a:p>
+            <a:p>
+              <a:pPr marL="171450" indent="-171450">
+                <a:buFontTx/>
+                <a:buChar char="-"/>
+              </a:pPr>
+              <a:r>
+                <a:rPr lang="ko-KR" altLang="en-US" sz="800">
+                  <a:cs typeface="Arial" pitchFamily="34" charset="0"/>
+                </a:rPr>
+                <a:t>본인 진로 방향 교집합</a:t>
+              </a:r>
+              <a:endParaRPr lang="en-US" altLang="ko-KR" sz="800">
+                <a:cs typeface="Arial" pitchFamily="34" charset="0"/>
+              </a:endParaRPr>
+            </a:p>
+            <a:p>
+              <a:pPr marL="171450" indent="-171450">
+                <a:buFontTx/>
+                <a:buChar char="-"/>
+              </a:pPr>
+              <a:r>
+                <a:rPr lang="ko-KR" altLang="en-US" sz="800">
+                  <a:cs typeface="Arial" pitchFamily="34" charset="0"/>
+                </a:rPr>
+                <a:t>문제의 가설 변환</a:t>
+              </a:r>
+              <a:endParaRPr lang="en-US" altLang="ko-KR" sz="800">
+                <a:cs typeface="Arial" pitchFamily="34" charset="0"/>
+              </a:endParaRPr>
+            </a:p>
+            <a:p>
+              <a:pPr marL="228600" indent="-228600">
+                <a:buAutoNum type="arabicParenBoth"/>
+              </a:pPr>
+              <a:endParaRPr lang="en-US" altLang="ko-KR" sz="800">
+                <a:cs typeface="Arial" pitchFamily="34" charset="0"/>
+              </a:endParaRPr>
+            </a:p>
+            <a:p>
+              <a:r>
+                <a:rPr lang="en-US" altLang="ko-KR" sz="800" b="1">
+                  <a:cs typeface="Arial" pitchFamily="34" charset="0"/>
+                </a:rPr>
+                <a:t>(2) </a:t>
+              </a:r>
+              <a:r>
+                <a:rPr lang="ko-KR" altLang="en-US" sz="800" b="1">
+                  <a:cs typeface="Arial" pitchFamily="34" charset="0"/>
+                </a:rPr>
+                <a:t>데이터</a:t>
+              </a:r>
+              <a:r>
+                <a:rPr lang="en-US" altLang="ko-KR" sz="800" b="1">
+                  <a:cs typeface="Arial" pitchFamily="34" charset="0"/>
+                </a:rPr>
+                <a:t> </a:t>
+              </a:r>
+              <a:r>
+                <a:rPr lang="ko-KR" altLang="en-US" sz="800" b="1">
+                  <a:cs typeface="Arial" pitchFamily="34" charset="0"/>
+                </a:rPr>
+                <a:t>해결 전략 설정</a:t>
+              </a:r>
+              <a:r>
+                <a:rPr lang="en-US" altLang="ko-KR" sz="800" b="1">
+                  <a:cs typeface="Arial" pitchFamily="34" charset="0"/>
+                </a:rPr>
+                <a:t>: </a:t>
+              </a:r>
+            </a:p>
+            <a:p>
+              <a:pPr marL="171450" indent="-171450">
+                <a:buFontTx/>
+                <a:buChar char="-"/>
+              </a:pPr>
+              <a:r>
+                <a:rPr lang="ko-KR" altLang="en-US" sz="800">
+                  <a:cs typeface="Arial" pitchFamily="34" charset="0"/>
+                </a:rPr>
+                <a:t>가설의 데이터 문제로 변환</a:t>
+              </a:r>
+              <a:endParaRPr lang="en-US" altLang="ko-KR" sz="800">
+                <a:cs typeface="Arial" pitchFamily="34" charset="0"/>
+              </a:endParaRPr>
+            </a:p>
+            <a:p>
+              <a:pPr marL="171450" indent="-171450">
+                <a:buFontTx/>
+                <a:buChar char="-"/>
+              </a:pPr>
+              <a:r>
+                <a:rPr lang="en-US" altLang="ko-KR" sz="800">
+                  <a:cs typeface="Arial" pitchFamily="34" charset="0"/>
+                </a:rPr>
+                <a:t>AI as a Service </a:t>
+              </a:r>
+              <a:r>
+                <a:rPr lang="ko-KR" altLang="en-US" sz="800">
+                  <a:cs typeface="Arial" pitchFamily="34" charset="0"/>
+                </a:rPr>
+                <a:t>적용</a:t>
+              </a:r>
+              <a:endParaRPr lang="en-US" altLang="ko-KR" sz="800">
+                <a:cs typeface="Arial" pitchFamily="34" charset="0"/>
+              </a:endParaRPr>
+            </a:p>
+          </p:txBody>
+        </p:sp>
+        <p:sp>
+          <p:nvSpPr>
+            <p:cNvPr id="712" name="TextBox 711">
+              <a:extLst>
+                <a:ext uri="{FF2B5EF4-FFF2-40B4-BE49-F238E27FC236}">
+                  <a16:creationId xmlns:a16="http://schemas.microsoft.com/office/drawing/2014/main" id="{02F5803E-657D-7AFA-00EC-EDD4F1768FC0}"/>
+                </a:ext>
+              </a:extLst>
+            </p:cNvPr>
+            <p:cNvSpPr txBox="1"/>
+            <p:nvPr/>
+          </p:nvSpPr>
+          <p:spPr>
+            <a:xfrm>
+              <a:off x="3017861" y="4222351"/>
+              <a:ext cx="1901330" cy="307777"/>
+            </a:xfrm>
+            <a:prstGeom prst="rect">
+              <a:avLst/>
+            </a:prstGeom>
+            <a:noFill/>
+          </p:spPr>
+          <p:txBody>
+            <a:bodyPr wrap="square" rtlCol="0">
+              <a:spAutoFit/>
+            </a:bodyPr>
+            <a:lstStyle/>
+            <a:p>
+              <a:pPr algn="ctr"/>
+              <a:r>
+                <a:rPr lang="en-US" altLang="ko-KR" b="1">
+                  <a:solidFill>
+                    <a:srgbClr val="7030A0"/>
+                  </a:solidFill>
+                  <a:cs typeface="Arial" pitchFamily="34" charset="0"/>
+                </a:rPr>
+                <a:t>Brand Diving</a:t>
+              </a:r>
+              <a:endParaRPr lang="ko-KR" altLang="en-US" sz="1400" b="1" dirty="0">
+                <a:solidFill>
+                  <a:srgbClr val="7030A0"/>
+                </a:solidFill>
+                <a:cs typeface="Arial" pitchFamily="34" charset="0"/>
+              </a:endParaRPr>
+            </a:p>
+          </p:txBody>
+        </p:sp>
+      </p:grpSp>
+      <p:sp>
+        <p:nvSpPr>
+          <p:cNvPr id="715" name="화살표: 갈매기형 수장 714">
+            <a:extLst>
+              <a:ext uri="{FF2B5EF4-FFF2-40B4-BE49-F238E27FC236}">
+                <a16:creationId xmlns:a16="http://schemas.microsoft.com/office/drawing/2014/main" id="{A6184BB1-44B5-5D7B-846F-0D2098CF4F25}"/>
+              </a:ext>
+            </a:extLst>
+          </p:cNvPr>
+          <p:cNvSpPr/>
+          <p:nvPr/>
+        </p:nvSpPr>
+        <p:spPr>
+          <a:xfrm>
+            <a:off x="6738495" y="1713768"/>
+            <a:ext cx="2342874" cy="515566"/>
+          </a:xfrm>
+          <a:prstGeom prst="chevron">
+            <a:avLst/>
+          </a:prstGeom>
+          <a:solidFill>
+            <a:srgbClr val="FF0000"/>
+          </a:solidFill>
+          <a:ln>
+            <a:noFill/>
+          </a:ln>
+        </p:spPr>
+        <p:style>
+          <a:lnRef idx="2">
+            <a:schemeClr val="accent1">
+              <a:shade val="50000"/>
+            </a:schemeClr>
+          </a:lnRef>
+          <a:fillRef idx="1">
+            <a:schemeClr val="accent1"/>
+          </a:fillRef>
+          <a:effectRef idx="0">
+            <a:schemeClr val="accent1"/>
+          </a:effectRef>
+          <a:fontRef idx="minor">
+            <a:schemeClr val="lt1"/>
+          </a:fontRef>
+        </p:style>
+        <p:txBody>
+          <a:bodyPr rtlCol="0" anchor="ctr"/>
+          <a:lstStyle/>
+          <a:p>
+            <a:pPr algn="ctr"/>
+            <a:endParaRPr lang="ko-KR" altLang="en-US"/>
+          </a:p>
+        </p:txBody>
+      </p:sp>
+      <p:sp>
+        <p:nvSpPr>
+          <p:cNvPr id="716" name="TextBox 715">
+            <a:extLst>
+              <a:ext uri="{FF2B5EF4-FFF2-40B4-BE49-F238E27FC236}">
+                <a16:creationId xmlns:a16="http://schemas.microsoft.com/office/drawing/2014/main" id="{6906C51A-D829-F0F9-5AF9-789C686C04A1}"/>
+              </a:ext>
+            </a:extLst>
+          </p:cNvPr>
+          <p:cNvSpPr txBox="1"/>
+          <p:nvPr/>
+        </p:nvSpPr>
+        <p:spPr>
+          <a:xfrm>
+            <a:off x="7014592" y="1628864"/>
+            <a:ext cx="1772348" cy="646331"/>
+          </a:xfrm>
+          <a:prstGeom prst="rect">
+            <a:avLst/>
+          </a:prstGeom>
+          <a:noFill/>
+        </p:spPr>
+        <p:txBody>
+          <a:bodyPr wrap="square" rtlCol="0">
+            <a:spAutoFit/>
+          </a:bodyPr>
+          <a:lstStyle/>
+          <a:p>
+            <a:pPr algn="ctr"/>
+            <a:r>
+              <a:rPr lang="en-US" altLang="ko-KR" sz="1800" b="1">
+                <a:solidFill>
+                  <a:schemeClr val="bg1"/>
+                </a:solidFill>
+              </a:rPr>
+              <a:t>2026 2Q</a:t>
+            </a:r>
+          </a:p>
+          <a:p>
+            <a:pPr algn="ctr"/>
+            <a:r>
+              <a:rPr lang="en-US" altLang="ko-KR" sz="1800" b="1">
+                <a:solidFill>
+                  <a:schemeClr val="bg1"/>
+                </a:solidFill>
+              </a:rPr>
+              <a:t>(3~6M)</a:t>
+            </a:r>
+            <a:endParaRPr lang="ko-KR" altLang="en-US" sz="1800" b="1" dirty="0">
+              <a:solidFill>
+                <a:schemeClr val="bg1"/>
+              </a:solidFill>
+            </a:endParaRPr>
+          </a:p>
+        </p:txBody>
+      </p:sp>
+      <p:grpSp>
+        <p:nvGrpSpPr>
+          <p:cNvPr id="718" name="Group 66">
+            <a:extLst>
+              <a:ext uri="{FF2B5EF4-FFF2-40B4-BE49-F238E27FC236}">
+                <a16:creationId xmlns:a16="http://schemas.microsoft.com/office/drawing/2014/main" id="{FE140407-AE53-3C02-6F17-4ACEA9256DCB}"/>
+              </a:ext>
+            </a:extLst>
+          </p:cNvPr>
+          <p:cNvGrpSpPr/>
+          <p:nvPr/>
+        </p:nvGrpSpPr>
+        <p:grpSpPr>
+          <a:xfrm>
+            <a:off x="6864262" y="2527791"/>
+            <a:ext cx="2091340" cy="2276954"/>
+            <a:chOff x="3017861" y="4222351"/>
+            <a:chExt cx="1917633" cy="2276954"/>
+          </a:xfrm>
+        </p:grpSpPr>
+        <p:sp>
+          <p:nvSpPr>
+            <p:cNvPr id="719" name="TextBox 718">
+              <a:extLst>
+                <a:ext uri="{FF2B5EF4-FFF2-40B4-BE49-F238E27FC236}">
+                  <a16:creationId xmlns:a16="http://schemas.microsoft.com/office/drawing/2014/main" id="{BB316F6F-017B-6C38-CB44-223D6376D835}"/>
+                </a:ext>
+              </a:extLst>
+            </p:cNvPr>
+            <p:cNvSpPr txBox="1"/>
+            <p:nvPr/>
+          </p:nvSpPr>
+          <p:spPr>
+            <a:xfrm>
+              <a:off x="3017861" y="4560313"/>
+              <a:ext cx="1917633" cy="1938992"/>
+            </a:xfrm>
+            <a:prstGeom prst="rect">
+              <a:avLst/>
+            </a:prstGeom>
+            <a:noFill/>
+          </p:spPr>
+          <p:txBody>
+            <a:bodyPr wrap="square" rtlCol="0">
+              <a:spAutoFit/>
+            </a:bodyPr>
+            <a:lstStyle/>
+            <a:p>
+              <a:pPr algn="ctr"/>
+              <a:r>
+                <a:rPr lang="en-US" altLang="ko-KR" sz="800" b="1" u="sng">
+                  <a:cs typeface="Arial" pitchFamily="34" charset="0"/>
+                </a:rPr>
+                <a:t>[</a:t>
+              </a:r>
+              <a:r>
+                <a:rPr lang="ko-KR" altLang="en-US" sz="800" b="1" u="sng">
+                  <a:cs typeface="Arial" pitchFamily="34" charset="0"/>
+                </a:rPr>
+                <a:t>선수과목</a:t>
+              </a:r>
+              <a:r>
+                <a:rPr lang="en-US" altLang="ko-KR" sz="800" b="1" u="sng">
+                  <a:cs typeface="Arial" pitchFamily="34" charset="0"/>
+                </a:rPr>
+                <a:t>]</a:t>
+              </a:r>
+            </a:p>
+            <a:p>
+              <a:pPr algn="ctr"/>
+              <a:r>
+                <a:rPr lang="en-US" altLang="ko-KR" sz="800">
+                  <a:cs typeface="Arial" pitchFamily="34" charset="0"/>
+                </a:rPr>
+                <a:t>Project Diving</a:t>
+              </a:r>
+            </a:p>
+            <a:p>
+              <a:pPr algn="ctr"/>
+              <a:endParaRPr lang="en-US" altLang="ko-KR" sz="800">
+                <a:cs typeface="Arial" pitchFamily="34" charset="0"/>
+              </a:endParaRPr>
+            </a:p>
+            <a:p>
+              <a:pPr algn="ctr"/>
+              <a:endParaRPr lang="en-US" altLang="ko-KR" sz="800">
+                <a:cs typeface="Arial" pitchFamily="34" charset="0"/>
+              </a:endParaRPr>
+            </a:p>
+            <a:p>
+              <a:pPr algn="ctr"/>
+              <a:endParaRPr lang="en-US" altLang="ko-KR" sz="800">
+                <a:cs typeface="Arial" pitchFamily="34" charset="0"/>
+              </a:endParaRPr>
+            </a:p>
+            <a:p>
+              <a:pPr algn="ctr"/>
+              <a:r>
+                <a:rPr lang="en-US" altLang="ko-KR" sz="800" b="1" u="sng">
+                  <a:cs typeface="Arial" pitchFamily="34" charset="0"/>
+                </a:rPr>
+                <a:t>[</a:t>
+              </a:r>
+              <a:r>
+                <a:rPr lang="ko-KR" altLang="en-US" sz="800" b="1" u="sng">
+                  <a:cs typeface="Arial" pitchFamily="34" charset="0"/>
+                </a:rPr>
+                <a:t>목표</a:t>
+              </a:r>
+              <a:r>
+                <a:rPr lang="en-US" altLang="ko-KR" sz="800" b="1" u="sng">
+                  <a:cs typeface="Arial" pitchFamily="34" charset="0"/>
+                </a:rPr>
+                <a:t>: </a:t>
+              </a:r>
+              <a:r>
+                <a:rPr lang="ko-KR" altLang="en-US" sz="800" b="1" u="sng">
+                  <a:cs typeface="Arial" pitchFamily="34" charset="0"/>
+                </a:rPr>
+                <a:t>개인 브랜딩 확장</a:t>
+              </a:r>
+              <a:r>
+                <a:rPr lang="en-US" altLang="ko-KR" sz="800" b="1" u="sng">
+                  <a:cs typeface="Arial" pitchFamily="34" charset="0"/>
+                </a:rPr>
+                <a:t>]</a:t>
+              </a:r>
+            </a:p>
+            <a:p>
+              <a:pPr algn="ctr"/>
+              <a:endParaRPr lang="en-US" altLang="ko-KR" sz="800" b="1">
+                <a:cs typeface="Arial" pitchFamily="34" charset="0"/>
+              </a:endParaRPr>
+            </a:p>
+            <a:p>
+              <a:r>
+                <a:rPr lang="en-US" altLang="ko-KR" sz="800" b="1">
+                  <a:cs typeface="Arial" pitchFamily="34" charset="0"/>
+                </a:rPr>
+                <a:t>(1) </a:t>
+              </a:r>
+              <a:r>
+                <a:rPr lang="ko-KR" altLang="en-US" sz="800" b="1">
+                  <a:cs typeface="Arial" pitchFamily="34" charset="0"/>
+                </a:rPr>
+                <a:t>개인 브랜딩 증명 집중</a:t>
+              </a:r>
+              <a:endParaRPr lang="en-US" altLang="ko-KR" sz="800" b="1">
+                <a:cs typeface="Arial" pitchFamily="34" charset="0"/>
+              </a:endParaRPr>
+            </a:p>
+            <a:p>
+              <a:pPr marL="171450" indent="-171450">
+                <a:buFontTx/>
+                <a:buChar char="-"/>
+              </a:pPr>
+              <a:r>
+                <a:rPr lang="ko-KR" altLang="en-US" sz="800">
+                  <a:cs typeface="Arial" pitchFamily="34" charset="0"/>
+                </a:rPr>
+                <a:t>공모전 수상 전략</a:t>
+              </a:r>
+              <a:endParaRPr lang="en-US" altLang="ko-KR" sz="800">
+                <a:cs typeface="Arial" pitchFamily="34" charset="0"/>
+              </a:endParaRPr>
+            </a:p>
+            <a:p>
+              <a:pPr marL="171450" indent="-171450">
+                <a:buFontTx/>
+                <a:buChar char="-"/>
+              </a:pPr>
+              <a:r>
+                <a:rPr lang="ko-KR" altLang="en-US" sz="800">
+                  <a:cs typeface="Arial" pitchFamily="34" charset="0"/>
+                </a:rPr>
+                <a:t>논문 발행 전략</a:t>
+              </a:r>
+              <a:endParaRPr lang="en-US" altLang="ko-KR" sz="800">
+                <a:cs typeface="Arial" pitchFamily="34" charset="0"/>
+              </a:endParaRPr>
+            </a:p>
+            <a:p>
+              <a:pPr marL="171450" indent="-171450">
+                <a:buFontTx/>
+                <a:buChar char="-"/>
+              </a:pPr>
+              <a:r>
+                <a:rPr lang="ko-KR" altLang="en-US" sz="800">
+                  <a:cs typeface="Arial" pitchFamily="34" charset="0"/>
+                </a:rPr>
+                <a:t>특허</a:t>
+              </a:r>
+              <a:r>
+                <a:rPr lang="en-US" altLang="ko-KR" sz="800">
+                  <a:cs typeface="Arial" pitchFamily="34" charset="0"/>
+                </a:rPr>
+                <a:t>/</a:t>
+              </a:r>
+              <a:r>
+                <a:rPr lang="ko-KR" altLang="en-US" sz="800">
+                  <a:cs typeface="Arial" pitchFamily="34" charset="0"/>
+                </a:rPr>
+                <a:t>창업 계획 전략</a:t>
+              </a:r>
+              <a:endParaRPr lang="en-US" altLang="ko-KR" sz="800">
+                <a:cs typeface="Arial" pitchFamily="34" charset="0"/>
+              </a:endParaRPr>
+            </a:p>
+            <a:p>
+              <a:endParaRPr lang="en-US" altLang="ko-KR" sz="800">
+                <a:cs typeface="Arial" pitchFamily="34" charset="0"/>
+              </a:endParaRPr>
+            </a:p>
+            <a:p>
+              <a:r>
+                <a:rPr lang="en-US" altLang="ko-KR" sz="800" b="1">
+                  <a:cs typeface="Arial" pitchFamily="34" charset="0"/>
+                </a:rPr>
+                <a:t>(2) </a:t>
+              </a:r>
+              <a:r>
+                <a:rPr lang="ko-KR" altLang="en-US" sz="800" b="1">
+                  <a:cs typeface="Arial" pitchFamily="34" charset="0"/>
+                </a:rPr>
+                <a:t>적극적 브랜딩 피드백</a:t>
+              </a:r>
+              <a:endParaRPr lang="en-US" altLang="ko-KR" sz="800" b="1">
+                <a:cs typeface="Arial" pitchFamily="34" charset="0"/>
+              </a:endParaRPr>
+            </a:p>
+            <a:p>
+              <a:pPr marL="171450" indent="-171450">
+                <a:buFontTx/>
+                <a:buChar char="-"/>
+              </a:pPr>
+              <a:r>
+                <a:rPr lang="ko-KR" altLang="en-US" sz="800">
+                  <a:cs typeface="Arial" pitchFamily="34" charset="0"/>
+                </a:rPr>
+                <a:t>인공지능기반의사결정 학점화</a:t>
+              </a:r>
+              <a:endParaRPr lang="en-US" altLang="ko-KR" sz="800">
+                <a:cs typeface="Arial" pitchFamily="34" charset="0"/>
+              </a:endParaRPr>
+            </a:p>
+            <a:p>
+              <a:pPr marL="171450" indent="-171450">
+                <a:buFontTx/>
+                <a:buChar char="-"/>
+              </a:pPr>
+              <a:r>
+                <a:rPr lang="ko-KR" altLang="en-US" sz="800">
+                  <a:cs typeface="Arial" pitchFamily="34" charset="0"/>
+                </a:rPr>
+                <a:t>산출물 완성 및 전문가 포트폴리오화</a:t>
+              </a:r>
+              <a:endParaRPr lang="en-US" altLang="ko-KR" sz="800">
+                <a:cs typeface="Arial" pitchFamily="34" charset="0"/>
+              </a:endParaRPr>
+            </a:p>
+          </p:txBody>
+        </p:sp>
+        <p:sp>
+          <p:nvSpPr>
+            <p:cNvPr id="720" name="TextBox 719">
+              <a:extLst>
+                <a:ext uri="{FF2B5EF4-FFF2-40B4-BE49-F238E27FC236}">
+                  <a16:creationId xmlns:a16="http://schemas.microsoft.com/office/drawing/2014/main" id="{89A0B943-5BF4-6283-A649-D39F8AE62EDC}"/>
+                </a:ext>
+              </a:extLst>
+            </p:cNvPr>
+            <p:cNvSpPr txBox="1"/>
+            <p:nvPr/>
+          </p:nvSpPr>
+          <p:spPr>
+            <a:xfrm>
+              <a:off x="3017861" y="4222351"/>
+              <a:ext cx="1901330" cy="307777"/>
+            </a:xfrm>
+            <a:prstGeom prst="rect">
+              <a:avLst/>
+            </a:prstGeom>
+            <a:noFill/>
+          </p:spPr>
+          <p:txBody>
+            <a:bodyPr wrap="square" rtlCol="0">
+              <a:spAutoFit/>
+            </a:bodyPr>
+            <a:lstStyle/>
+            <a:p>
+              <a:pPr algn="ctr"/>
+              <a:r>
+                <a:rPr lang="en-US" altLang="ko-KR" sz="1400" b="1">
+                  <a:solidFill>
+                    <a:srgbClr val="FF0000"/>
+                  </a:solidFill>
+                  <a:cs typeface="Arial" pitchFamily="34" charset="0"/>
+                </a:rPr>
+                <a:t>Brand Diving</a:t>
+              </a:r>
+              <a:endParaRPr lang="ko-KR" altLang="en-US" sz="1400" b="1" dirty="0">
+                <a:solidFill>
+                  <a:srgbClr val="FF0000"/>
+                </a:solidFill>
+                <a:cs typeface="Arial" pitchFamily="34" charset="0"/>
+              </a:endParaRPr>
+            </a:p>
+          </p:txBody>
+        </p:sp>
+      </p:grpSp>
+      <p:cxnSp>
+        <p:nvCxnSpPr>
+          <p:cNvPr id="750" name="직선 화살표 연결선 749">
+            <a:extLst>
+              <a:ext uri="{FF2B5EF4-FFF2-40B4-BE49-F238E27FC236}">
+                <a16:creationId xmlns:a16="http://schemas.microsoft.com/office/drawing/2014/main" id="{12A1AABD-A483-9CC2-F3A2-1798C9033419}"/>
+              </a:ext>
+            </a:extLst>
+          </p:cNvPr>
+          <p:cNvCxnSpPr>
+            <a:cxnSpLocks/>
+          </p:cNvCxnSpPr>
+          <p:nvPr/>
+        </p:nvCxnSpPr>
+        <p:spPr>
+          <a:xfrm>
+            <a:off x="3514588" y="2288085"/>
+            <a:ext cx="0" cy="257288"/>
+          </a:xfrm>
+          <a:prstGeom prst="straightConnector1">
+            <a:avLst/>
+          </a:prstGeom>
+          <a:ln w="19050">
+            <a:solidFill>
+              <a:srgbClr val="FFC000"/>
+            </a:solidFill>
+            <a:tailEnd type="triangle"/>
+          </a:ln>
+        </p:spPr>
+        <p:style>
+          <a:lnRef idx="1">
+            <a:schemeClr val="accent1"/>
+          </a:lnRef>
+          <a:fillRef idx="0">
+            <a:schemeClr val="accent1"/>
+          </a:fillRef>
+          <a:effectRef idx="0">
+            <a:schemeClr val="accent1"/>
+          </a:effectRef>
+          <a:fontRef idx="minor">
+            <a:schemeClr val="tx1"/>
+          </a:fontRef>
+        </p:style>
+      </p:cxnSp>
+      <p:cxnSp>
+        <p:nvCxnSpPr>
+          <p:cNvPr id="752" name="직선 화살표 연결선 751">
+            <a:extLst>
+              <a:ext uri="{FF2B5EF4-FFF2-40B4-BE49-F238E27FC236}">
+                <a16:creationId xmlns:a16="http://schemas.microsoft.com/office/drawing/2014/main" id="{6A9E3670-BB05-83F8-D299-851B591F3F7B}"/>
+              </a:ext>
+            </a:extLst>
+          </p:cNvPr>
+          <p:cNvCxnSpPr>
+            <a:cxnSpLocks/>
+          </p:cNvCxnSpPr>
+          <p:nvPr/>
+        </p:nvCxnSpPr>
+        <p:spPr>
+          <a:xfrm>
+            <a:off x="5712665" y="2288085"/>
+            <a:ext cx="0" cy="257288"/>
+          </a:xfrm>
+          <a:prstGeom prst="straightConnector1">
+            <a:avLst/>
+          </a:prstGeom>
+          <a:ln w="19050">
+            <a:solidFill>
+              <a:srgbClr val="7030A0"/>
+            </a:solidFill>
+            <a:tailEnd type="triangle"/>
+          </a:ln>
+        </p:spPr>
+        <p:style>
+          <a:lnRef idx="1">
+            <a:schemeClr val="accent1"/>
+          </a:lnRef>
+          <a:fillRef idx="0">
+            <a:schemeClr val="accent1"/>
+          </a:fillRef>
+          <a:effectRef idx="0">
+            <a:schemeClr val="accent1"/>
+          </a:effectRef>
+          <a:fontRef idx="minor">
+            <a:schemeClr val="tx1"/>
+          </a:fontRef>
+        </p:style>
+      </p:cxnSp>
+      <p:cxnSp>
+        <p:nvCxnSpPr>
+          <p:cNvPr id="753" name="직선 화살표 연결선 752">
+            <a:extLst>
+              <a:ext uri="{FF2B5EF4-FFF2-40B4-BE49-F238E27FC236}">
+                <a16:creationId xmlns:a16="http://schemas.microsoft.com/office/drawing/2014/main" id="{E539D99E-0216-5888-8D68-C00527F9F540}"/>
+              </a:ext>
+            </a:extLst>
+          </p:cNvPr>
+          <p:cNvCxnSpPr>
+            <a:cxnSpLocks/>
+          </p:cNvCxnSpPr>
+          <p:nvPr/>
+        </p:nvCxnSpPr>
+        <p:spPr>
+          <a:xfrm>
+            <a:off x="7928327" y="2288085"/>
+            <a:ext cx="0" cy="257288"/>
+          </a:xfrm>
+          <a:prstGeom prst="straightConnector1">
+            <a:avLst/>
+          </a:prstGeom>
+          <a:ln w="19050">
+            <a:solidFill>
+              <a:srgbClr val="FF0000"/>
+            </a:solidFill>
+            <a:tailEnd type="triangle"/>
+          </a:ln>
+        </p:spPr>
+        <p:style>
+          <a:lnRef idx="1">
+            <a:schemeClr val="accent1"/>
+          </a:lnRef>
+          <a:fillRef idx="0">
+            <a:schemeClr val="accent1"/>
+          </a:fillRef>
+          <a:effectRef idx="0">
+            <a:schemeClr val="accent1"/>
+          </a:effectRef>
+          <a:fontRef idx="minor">
+            <a:schemeClr val="tx1"/>
+          </a:fontRef>
+        </p:style>
+      </p:cxnSp>
+      <p:sp>
+        <p:nvSpPr>
+          <p:cNvPr id="5" name="Google Shape;534;p39">
+            <a:extLst>
+              <a:ext uri="{FF2B5EF4-FFF2-40B4-BE49-F238E27FC236}">
+                <a16:creationId xmlns:a16="http://schemas.microsoft.com/office/drawing/2014/main" id="{CD14EFDB-FEB3-D363-8AF9-B8CC0E05BC5F}"/>
+              </a:ext>
+            </a:extLst>
+          </p:cNvPr>
+          <p:cNvSpPr txBox="1"/>
+          <p:nvPr/>
+        </p:nvSpPr>
+        <p:spPr>
+          <a:xfrm>
+            <a:off x="594703" y="5581671"/>
+            <a:ext cx="7954483" cy="475046"/>
+          </a:xfrm>
+          <a:prstGeom prst="rect">
+            <a:avLst/>
+          </a:prstGeom>
+          <a:noFill/>
+          <a:ln>
+            <a:noFill/>
+          </a:ln>
+        </p:spPr>
+        <p:txBody>
+          <a:bodyPr spcFirstLastPara="1" wrap="square" lIns="91425" tIns="45700" rIns="91425" bIns="45700" anchor="t" anchorCtr="0">
+            <a:noAutofit/>
+          </a:bodyPr>
+          <a:lstStyle/>
+          <a:p>
+            <a:pPr marR="0" lvl="0" algn="ctr" rtl="0">
+              <a:lnSpc>
+                <a:spcPct val="150000"/>
+              </a:lnSpc>
+              <a:spcBef>
+                <a:spcPts val="0"/>
+              </a:spcBef>
+              <a:spcAft>
+                <a:spcPts val="0"/>
+              </a:spcAft>
+              <a:buClr>
+                <a:schemeClr val="dk1"/>
+              </a:buClr>
+              <a:buSzPts val="1400"/>
+            </a:pPr>
+            <a:r>
+              <a:rPr lang="en-US" altLang="ko-KR" sz="1600" b="1" u="sng">
+                <a:solidFill>
+                  <a:srgbClr val="FF0000"/>
+                </a:solidFill>
+                <a:latin typeface="Calibri" panose="020F0502020204030204" pitchFamily="34" charset="0"/>
+                <a:ea typeface="Calibri"/>
+                <a:cs typeface="Calibri" panose="020F0502020204030204" pitchFamily="34" charset="0"/>
+                <a:sym typeface="Calibri"/>
+              </a:rPr>
+              <a:t>* </a:t>
+            </a:r>
+            <a:r>
+              <a:rPr lang="ko-KR" altLang="en-US" sz="1600" b="1" i="0" u="sng" strike="noStrike" cap="none">
+                <a:solidFill>
+                  <a:srgbClr val="FF0000"/>
+                </a:solidFill>
+                <a:latin typeface="Calibri" panose="020F0502020204030204" pitchFamily="34" charset="0"/>
+                <a:ea typeface="Calibri"/>
+                <a:cs typeface="Calibri" panose="020F0502020204030204" pitchFamily="34" charset="0"/>
+                <a:sym typeface="Calibri"/>
+              </a:rPr>
+              <a:t>기존 기수들은 </a:t>
+            </a:r>
+            <a:r>
+              <a:rPr lang="en-US" altLang="ko-KR" sz="1600" b="1" i="0" u="sng" strike="noStrike" cap="none">
+                <a:solidFill>
+                  <a:srgbClr val="FF0000"/>
+                </a:solidFill>
+                <a:latin typeface="Calibri" panose="020F0502020204030204" pitchFamily="34" charset="0"/>
+                <a:ea typeface="Calibri"/>
+                <a:cs typeface="Calibri" panose="020F0502020204030204" pitchFamily="34" charset="0"/>
+                <a:sym typeface="Calibri"/>
+              </a:rPr>
+              <a:t>1</a:t>
+            </a:r>
+            <a:r>
+              <a:rPr lang="ko-KR" altLang="en-US" sz="1600" b="1" i="0" u="sng" strike="noStrike" cap="none">
+                <a:solidFill>
+                  <a:srgbClr val="FF0000"/>
+                </a:solidFill>
+                <a:latin typeface="Calibri" panose="020F0502020204030204" pitchFamily="34" charset="0"/>
+                <a:ea typeface="Calibri"/>
+                <a:cs typeface="Calibri" panose="020F0502020204030204" pitchFamily="34" charset="0"/>
+                <a:sym typeface="Calibri"/>
+              </a:rPr>
+              <a:t>분기씩 선행하여 진행 </a:t>
+            </a:r>
+            <a:r>
+              <a:rPr lang="en-US" altLang="ko-KR" sz="1600" b="1" i="0" u="sng" strike="noStrike" cap="none">
+                <a:solidFill>
+                  <a:srgbClr val="FF0000"/>
+                </a:solidFill>
+                <a:latin typeface="Calibri" panose="020F0502020204030204" pitchFamily="34" charset="0"/>
+                <a:ea typeface="Calibri"/>
+                <a:cs typeface="Calibri" panose="020F0502020204030204" pitchFamily="34" charset="0"/>
+                <a:sym typeface="Calibri"/>
+              </a:rPr>
+              <a:t>(3Q: </a:t>
+            </a:r>
+            <a:r>
+              <a:rPr lang="en-US" altLang="ko-KR" sz="1600" b="1" u="sng">
+                <a:solidFill>
+                  <a:srgbClr val="FF0000"/>
+                </a:solidFill>
+                <a:latin typeface="Calibri" panose="020F0502020204030204" pitchFamily="34" charset="0"/>
+                <a:ea typeface="Calibri"/>
+                <a:cs typeface="Calibri" panose="020F0502020204030204" pitchFamily="34" charset="0"/>
+                <a:sym typeface="Calibri"/>
+              </a:rPr>
+              <a:t>AI</a:t>
+            </a:r>
+            <a:r>
+              <a:rPr lang="ko-KR" altLang="en-US" sz="1600" b="1" u="sng">
+                <a:solidFill>
+                  <a:srgbClr val="FF0000"/>
+                </a:solidFill>
+                <a:latin typeface="Calibri" panose="020F0502020204030204" pitchFamily="34" charset="0"/>
+                <a:ea typeface="Calibri"/>
+                <a:cs typeface="Calibri" panose="020F0502020204030204" pitchFamily="34" charset="0"/>
+                <a:sym typeface="Calibri"/>
+              </a:rPr>
+              <a:t> </a:t>
+            </a:r>
+            <a:r>
+              <a:rPr lang="en-US" altLang="ko-KR" sz="1600" b="1" u="sng">
+                <a:solidFill>
+                  <a:srgbClr val="FF0000"/>
+                </a:solidFill>
+                <a:latin typeface="Calibri" panose="020F0502020204030204" pitchFamily="34" charset="0"/>
+                <a:ea typeface="Calibri"/>
+                <a:cs typeface="Calibri" panose="020F0502020204030204" pitchFamily="34" charset="0"/>
+                <a:sym typeface="Calibri"/>
+              </a:rPr>
+              <a:t>as</a:t>
+            </a:r>
+            <a:r>
+              <a:rPr lang="ko-KR" altLang="en-US" sz="1600" b="1" u="sng">
+                <a:solidFill>
+                  <a:srgbClr val="FF0000"/>
+                </a:solidFill>
+                <a:latin typeface="Calibri" panose="020F0502020204030204" pitchFamily="34" charset="0"/>
+                <a:ea typeface="Calibri"/>
+                <a:cs typeface="Calibri" panose="020F0502020204030204" pitchFamily="34" charset="0"/>
+                <a:sym typeface="Calibri"/>
+              </a:rPr>
+              <a:t> </a:t>
+            </a:r>
+            <a:r>
+              <a:rPr lang="en-US" altLang="ko-KR" sz="1600" b="1" u="sng">
+                <a:solidFill>
+                  <a:srgbClr val="FF0000"/>
+                </a:solidFill>
+                <a:latin typeface="Calibri" panose="020F0502020204030204" pitchFamily="34" charset="0"/>
+                <a:ea typeface="Calibri"/>
+                <a:cs typeface="Calibri" panose="020F0502020204030204" pitchFamily="34" charset="0"/>
+                <a:sym typeface="Calibri"/>
+              </a:rPr>
+              <a:t>a Service </a:t>
+            </a:r>
+            <a:r>
+              <a:rPr lang="en-US" altLang="ko-KR" sz="1600" b="1" u="sng">
+                <a:solidFill>
+                  <a:srgbClr val="FF0000"/>
+                </a:solidFill>
+                <a:latin typeface="Calibri" panose="020F0502020204030204" pitchFamily="34" charset="0"/>
+                <a:ea typeface="Calibri"/>
+                <a:cs typeface="Calibri" panose="020F0502020204030204" pitchFamily="34" charset="0"/>
+                <a:sym typeface="Wingdings" panose="05000000000000000000" pitchFamily="2" charset="2"/>
+              </a:rPr>
+              <a:t> 4Q~: Brand Diving) *</a:t>
+            </a:r>
+            <a:endParaRPr sz="1600" u="sng">
+              <a:solidFill>
+                <a:srgbClr val="FF0000"/>
+              </a:solidFill>
+              <a:latin typeface="Calibri" panose="020F0502020204030204" pitchFamily="34" charset="0"/>
+              <a:cs typeface="Calibri" panose="020F0502020204030204" pitchFamily="34" charset="0"/>
+            </a:endParaRPr>
+          </a:p>
+        </p:txBody>
+      </p:sp>
+    </p:spTree>
+    <p:extLst>
+      <p:ext uri="{BB962C8B-B14F-4D97-AF65-F5344CB8AC3E}">
+        <p14:creationId xmlns:p14="http://schemas.microsoft.com/office/powerpoint/2010/main" val="1190071377"/>
+      </p:ext>
+    </p:extLst>
+  </p:cSld>
+  <p:clrMapOvr>
+    <a:masterClrMapping/>
+  </p:clrMapOvr>
+</p:sld>
+</file>
+
+<file path=ppt/slides/slide4.xml><?xml version="1.0" encoding="utf-8"?>
+<p:sld xmlns:a="http://schemas.openxmlformats.org/drawingml/2006/main" xmlns:r="http://schemas.openxmlformats.org/officeDocument/2006/relationships" xmlns:p="http://schemas.openxmlformats.org/presentationml/2006/main">
+  <p:cSld>
+    <p:spTree>
+      <p:nvGrpSpPr>
+        <p:cNvPr id="1" name="Shape 575">
+          <a:extLst>
+            <a:ext uri="{FF2B5EF4-FFF2-40B4-BE49-F238E27FC236}">
               <a16:creationId xmlns:a16="http://schemas.microsoft.com/office/drawing/2014/main" id="{2C3A2FB4-D7F1-DF0C-8BF2-4C9BCA355DEF}"/>
             </a:ext>
           </a:extLst>
@@ -15553,7 +18061,7 @@
             <a:fld id="{CDF9F5A3-DAD3-49E7-B926-6F61E4EB127E}" type="slidenum">
               <a:rPr lang="ko-KR" altLang="en-US" smtClean="0"/>
               <a:pPr/>
-              <a:t>2</a:t>
+              <a:t>3</a:t>
             </a:fld>
             <a:r>
               <a:rPr lang="ko-KR" altLang="en-US"/>
@@ -16202,7 +18710,7 @@
 </p:sld>
 </file>
 
-<file path=ppt/slides/slide4.xml><?xml version="1.0" encoding="utf-8"?>
+<file path=ppt/slides/slide5.xml><?xml version="1.0" encoding="utf-8"?>
 <p:sld xmlns:a="http://schemas.openxmlformats.org/drawingml/2006/main" xmlns:r="http://schemas.openxmlformats.org/officeDocument/2006/relationships" xmlns:p="http://schemas.openxmlformats.org/presentationml/2006/main">
   <p:cSld>
     <p:spTree>
@@ -17091,7 +19599,7 @@
             <a:fld id="{CDF9F5A3-DAD3-49E7-B926-6F61E4EB127E}" type="slidenum">
               <a:rPr lang="ko-KR" altLang="en-US" smtClean="0"/>
               <a:pPr/>
-              <a:t>3</a:t>
+              <a:t>4</a:t>
             </a:fld>
             <a:r>
               <a:rPr lang="ko-KR" altLang="en-US"/>
@@ -17774,7 +20282,7 @@
 </p:sld>
 </file>
 
-<file path=ppt/slides/slide5.xml><?xml version="1.0" encoding="utf-8"?>
+<file path=ppt/slides/slide6.xml><?xml version="1.0" encoding="utf-8"?>
 <p:sld xmlns:a="http://schemas.openxmlformats.org/drawingml/2006/main" xmlns:r="http://schemas.openxmlformats.org/officeDocument/2006/relationships" xmlns:p="http://schemas.openxmlformats.org/presentationml/2006/main">
   <p:cSld>
     <p:spTree>
@@ -18771,7 +21279,7 @@
             <a:fld id="{CDF9F5A3-DAD3-49E7-B926-6F61E4EB127E}" type="slidenum">
               <a:rPr lang="ko-KR" altLang="en-US" smtClean="0"/>
               <a:pPr/>
-              <a:t>4</a:t>
+              <a:t>5</a:t>
             </a:fld>
             <a:r>
               <a:rPr lang="ko-KR" altLang="en-US"/>
@@ -19423,7 +21931,7 @@
 </p:sld>
 </file>
 
-<file path=ppt/slides/slide6.xml><?xml version="1.0" encoding="utf-8"?>
+<file path=ppt/slides/slide7.xml><?xml version="1.0" encoding="utf-8"?>
 <p:sld xmlns:a="http://schemas.openxmlformats.org/drawingml/2006/main" xmlns:r="http://schemas.openxmlformats.org/officeDocument/2006/relationships" xmlns:p="http://schemas.openxmlformats.org/presentationml/2006/main">
   <p:cSld>
     <p:spTree>
@@ -21213,7 +23721,7 @@
             <a:fld id="{CDF9F5A3-DAD3-49E7-B926-6F61E4EB127E}" type="slidenum">
               <a:rPr lang="ko-KR" altLang="en-US" smtClean="0"/>
               <a:pPr/>
-              <a:t>5</a:t>
+              <a:t>6</a:t>
             </a:fld>
             <a:r>
               <a:rPr lang="ko-KR" altLang="en-US"/>
